--- a/课件/C1/C1-B-01/C1-B-01.pptx
+++ b/课件/C1/C1-B-01/C1-B-01.pptx
@@ -2278,7 +2278,7 @@
                 <a:ea typeface="微软雅黑" pitchFamily="34" charset="-122"/>
                 <a:cs typeface="微软雅黑" pitchFamily="34" charset="-120"/>
               </a:rPr>
-              <a:t>第1节 指针入门与数组</a:t>
+              <a:t>第1节 地址与指针入门</a:t>
             </a:r>
             <a:endParaRPr lang="en-US" sz="2000" dirty="0"/>
           </a:p>
@@ -2434,7 +2434,7 @@
                 <a:ea typeface="微软雅黑" pitchFamily="34" charset="-122"/>
                 <a:cs typeface="微软雅黑" pitchFamily="34" charset="-120"/>
               </a:rPr>
-              <a:t>板书推演</a:t>
+              <a:t>取值的另一条路</a:t>
             </a:r>
             <a:endParaRPr lang="en-US" sz="1400" dirty="0"/>
           </a:p>
@@ -2473,7 +2473,7 @@
                 <a:ea typeface="微软雅黑" pitchFamily="34" charset="-122"/>
                 <a:cs typeface="微软雅黑" pitchFamily="34" charset="-120"/>
               </a:rPr>
-              <a:t>从零推演：声明指针并顺着它改值</a:t>
+              <a:t>*p：顺着地址找到格子里的东西</a:t>
             </a:r>
             <a:endParaRPr lang="en-US" sz="2800" dirty="0"/>
           </a:p>
@@ -2481,14 +2481,39 @@
       </p:sp>
       <p:sp>
         <p:nvSpPr>
-          <p:cNvPr id="5" name="Text 3"/>
-          <p:cNvSpPr/>
-          <p:nvPr/>
-        </p:nvSpPr>
-        <p:spPr>
-          <a:xfrm>
-            <a:off x="822960" y="2194560"/>
-            <a:ext cx="10545775" cy="685800"/>
+          <p:cNvPr id="5" name="Shape 3"/>
+          <p:cNvSpPr/>
+          <p:nvPr/>
+        </p:nvSpPr>
+        <p:spPr>
+          <a:xfrm>
+            <a:off x="822960" y="2395728"/>
+            <a:ext cx="10545775" cy="1033272"/>
+          </a:xfrm>
+          <a:prstGeom prst="rect">
+            <a:avLst/>
+          </a:prstGeom>
+          <a:solidFill>
+            <a:srgbClr val="F5F6F7"/>
+          </a:solidFill>
+          <a:ln w="9525">
+            <a:solidFill>
+              <a:srgbClr val="D8DBE0"/>
+            </a:solidFill>
+            <a:prstDash val="solid"/>
+          </a:ln>
+        </p:spPr>
+      </p:sp>
+      <p:sp>
+        <p:nvSpPr>
+          <p:cNvPr id="6" name="Text 4"/>
+          <p:cNvSpPr/>
+          <p:nvPr/>
+        </p:nvSpPr>
+        <p:spPr>
+          <a:xfrm>
+            <a:off x="1078992" y="2505456"/>
+            <a:ext cx="10033711" cy="813816"/>
           </a:xfrm>
           <a:prstGeom prst="rect">
             <a:avLst/>
@@ -2501,58 +2526,94 @@
           <a:lstStyle/>
           <a:p>
             <a:pPr algn="l" indent="0" marL="0">
-              <a:buNone/>
-            </a:pPr>
-            <a:r>
-              <a:rPr lang="en-US" sz="1600" dirty="0">
+              <a:lnSpc>
+                <a:spcPct val="125000"/>
+              </a:lnSpc>
+              <a:buNone/>
+            </a:pPr>
+            <a:r>
+              <a:rPr lang="en-US" sz="1400" dirty="0">
                 <a:solidFill>
                   <a:srgbClr val="1F2329"/>
+                </a:solidFill>
+                <a:latin typeface="Consolas" pitchFamily="34" charset="0"/>
+                <a:ea typeface="Consolas" pitchFamily="34" charset="-122"/>
+                <a:cs typeface="Consolas" pitchFamily="34" charset="-120"/>
+              </a:rPr>
+              <a:t>printf("%d", *p);     // 顺着p存的地址取值：10
+*p = 20;              // x也变成20：改的是同一格内存
+</a:t>
+            </a:r>
+            <a:endParaRPr lang="en-US" sz="1400" dirty="0"/>
+          </a:p>
+        </p:txBody>
+      </p:sp>
+      <p:sp>
+        <p:nvSpPr>
+          <p:cNvPr id="7" name="Text 5"/>
+          <p:cNvSpPr/>
+          <p:nvPr/>
+        </p:nvSpPr>
+        <p:spPr>
+          <a:xfrm>
+            <a:off x="896112" y="3630168"/>
+            <a:ext cx="10454335" cy="397764"/>
+          </a:xfrm>
+          <a:prstGeom prst="rect">
+            <a:avLst/>
+          </a:prstGeom>
+          <a:noFill/>
+          <a:ln/>
+        </p:spPr>
+        <p:txBody>
+          <a:bodyPr wrap="square" rtlCol="0" anchor="t"/>
+          <a:lstStyle/>
+          <a:p>
+            <a:pPr algn="l" indent="0" marL="0">
+              <a:lnSpc>
+                <a:spcPct val="115000"/>
+              </a:lnSpc>
+              <a:buNone/>
+            </a:pPr>
+            <a:r>
+              <a:rPr lang="en-US" sz="1800" b="1" dirty="0">
+                <a:solidFill>
+                  <a:srgbClr val="1F4E9C"/>
                 </a:solidFill>
                 <a:latin typeface="微软雅黑" pitchFamily="34" charset="0"/>
                 <a:ea typeface="微软雅黑" pitchFamily="34" charset="-122"/>
                 <a:cs typeface="微软雅黑" pitchFamily="34" charset="-120"/>
               </a:rPr>
-              <a:t>任务：画内存格子推演四步。① 画格子x，值10（编号随手写如1000）；② 画指针p，把x的编号写进p，箭头指向x；③ 写 *p，读出10；④ 写 *p = 20，把格子里的10改成20。只画格子、编号、值、箭头，不写程序骨架</a:t>
-            </a:r>
-            <a:endParaRPr lang="en-US" sz="1600" dirty="0"/>
-          </a:p>
-        </p:txBody>
-      </p:sp>
-      <p:sp>
-        <p:nvSpPr>
-          <p:cNvPr id="6" name="Shape 4"/>
-          <p:cNvSpPr/>
-          <p:nvPr/>
-        </p:nvSpPr>
-        <p:spPr>
-          <a:xfrm>
-            <a:off x="822960" y="3017520"/>
-            <a:ext cx="10545775" cy="2788920"/>
-          </a:xfrm>
-          <a:prstGeom prst="rect">
-            <a:avLst/>
-          </a:prstGeom>
-          <a:solidFill>
-            <a:srgbClr val="FFFFFF"/>
-          </a:solidFill>
-          <a:ln w="12700">
-            <a:solidFill>
-              <a:srgbClr val="B9C0C9"/>
-            </a:solidFill>
-            <a:prstDash val="dash"/>
-          </a:ln>
-        </p:spPr>
-      </p:sp>
-      <p:sp>
-        <p:nvSpPr>
-          <p:cNvPr id="7" name="Text 5"/>
-          <p:cNvSpPr/>
-          <p:nvPr/>
-        </p:nvSpPr>
-        <p:spPr>
-          <a:xfrm>
-            <a:off x="822960" y="5349240"/>
-            <a:ext cx="10545775" cy="365760"/>
+              <a:t>•  </a:t>
+            </a:r>
+            <a:pPr algn="l" indent="0" marL="0">
+              <a:lnSpc>
+                <a:spcPct val="115000"/>
+              </a:lnSpc>
+              <a:buNone/>
+            </a:pPr>
+            <a:r>
+              <a:rPr lang="en-US" sz="1800" dirty="0">
+                <a:solidFill>
+                  <a:srgbClr val="000000"/>
+                </a:solidFill>
+              </a:rPr>
+              <a:t>*读作取值：顺着地址找到那个格子，拿里面的东西；&amp;与*互逆</a:t>
+            </a:r>
+            <a:endParaRPr lang="en-US" sz="1800" dirty="0"/>
+          </a:p>
+        </p:txBody>
+      </p:sp>
+      <p:sp>
+        <p:nvSpPr>
+          <p:cNvPr id="8" name="Text 6"/>
+          <p:cNvSpPr/>
+          <p:nvPr/>
+        </p:nvSpPr>
+        <p:spPr>
+          <a:xfrm>
+            <a:off x="896112" y="4101084"/>
+            <a:ext cx="10454335" cy="397764"/>
           </a:xfrm>
           <a:prstGeom prst="rect">
             <a:avLst/>
@@ -2561,24 +2622,111 @@
           <a:ln/>
         </p:spPr>
         <p:txBody>
-          <a:bodyPr wrap="square" rtlCol="0" anchor="ctr"/>
-          <a:lstStyle/>
-          <a:p>
-            <a:pPr algn="r" indent="0" marL="0">
-              <a:buNone/>
-            </a:pPr>
-            <a:r>
-              <a:rPr lang="en-US" sz="1200" dirty="0">
-                <a:solidFill>
-                  <a:srgbClr val="8A9099"/>
+          <a:bodyPr wrap="square" rtlCol="0" anchor="t"/>
+          <a:lstStyle/>
+          <a:p>
+            <a:pPr algn="l" indent="0" marL="0">
+              <a:lnSpc>
+                <a:spcPct val="115000"/>
+              </a:lnSpc>
+              <a:buNone/>
+            </a:pPr>
+            <a:r>
+              <a:rPr lang="en-US" sz="1800" b="1" dirty="0">
+                <a:solidFill>
+                  <a:srgbClr val="1F4E9C"/>
                 </a:solidFill>
                 <a:latin typeface="微软雅黑" pitchFamily="34" charset="0"/>
                 <a:ea typeface="微软雅黑" pitchFamily="34" charset="-122"/>
                 <a:cs typeface="微软雅黑" pitchFamily="34" charset="-120"/>
               </a:rPr>
-              <a:t>此处板书推演</a:t>
-            </a:r>
-            <a:endParaRPr lang="en-US" sz="1200" dirty="0"/>
+              <a:t>•  </a:t>
+            </a:r>
+            <a:pPr algn="l" indent="0" marL="0">
+              <a:lnSpc>
+                <a:spcPct val="115000"/>
+              </a:lnSpc>
+              <a:buNone/>
+            </a:pPr>
+            <a:r>
+              <a:rPr lang="en-US" sz="1800" dirty="0">
+                <a:solidFill>
+                  <a:srgbClr val="000000"/>
+                </a:solidFill>
+              </a:rPr>
+              <a:t>x和*p不是两个变量，是同一格内存的两个名字</a:t>
+            </a:r>
+            <a:endParaRPr lang="en-US" sz="1800" dirty="0"/>
+          </a:p>
+        </p:txBody>
+      </p:sp>
+      <p:sp>
+        <p:nvSpPr>
+          <p:cNvPr id="9" name="Text 7"/>
+          <p:cNvSpPr/>
+          <p:nvPr/>
+        </p:nvSpPr>
+        <p:spPr>
+          <a:xfrm>
+            <a:off x="896112" y="4572000"/>
+            <a:ext cx="10454335" cy="397764"/>
+          </a:xfrm>
+          <a:prstGeom prst="rect">
+            <a:avLst/>
+          </a:prstGeom>
+          <a:noFill/>
+          <a:ln/>
+        </p:spPr>
+        <p:txBody>
+          <a:bodyPr wrap="square" rtlCol="0" anchor="t"/>
+          <a:lstStyle/>
+          <a:p>
+            <a:pPr algn="l" indent="0" marL="0">
+              <a:lnSpc>
+                <a:spcPct val="115000"/>
+              </a:lnSpc>
+              <a:buNone/>
+            </a:pPr>
+            <a:r>
+              <a:rPr lang="en-US" sz="1800" b="1" dirty="0">
+                <a:solidFill>
+                  <a:srgbClr val="1F4E9C"/>
+                </a:solidFill>
+                <a:latin typeface="微软雅黑" pitchFamily="34" charset="0"/>
+                <a:ea typeface="微软雅黑" pitchFamily="34" charset="-122"/>
+                <a:cs typeface="微软雅黑" pitchFamily="34" charset="-120"/>
+              </a:rPr>
+              <a:t>•  </a:t>
+            </a:r>
+            <a:pPr algn="l" indent="0" marL="0">
+              <a:lnSpc>
+                <a:spcPct val="115000"/>
+              </a:lnSpc>
+              <a:buNone/>
+            </a:pPr>
+            <a:r>
+              <a:rPr lang="en-US" sz="1800" dirty="0">
+                <a:solidFill>
+                  <a:srgbClr val="000000"/>
+                </a:solidFill>
+              </a:rPr>
+              <a:t>两个指针指向同一个变量时，谁改都一起变——这叫</a:t>
+            </a:r>
+            <a:pPr algn="l" indent="0" marL="0">
+              <a:lnSpc>
+                <a:spcPct val="115000"/>
+              </a:lnSpc>
+              <a:buNone/>
+            </a:pPr>
+            <a:r>
+              <a:rPr lang="en-US" sz="1800" b="1" dirty="0">
+                <a:solidFill>
+                  <a:srgbClr val="000000"/>
+                </a:solidFill>
+              </a:rPr>
+              <a:t>别名</a:t>
+            </a:r>
+            <a:endParaRPr lang="en-US" sz="1800" dirty="0"/>
           </a:p>
         </p:txBody>
       </p:sp>
@@ -2693,7 +2841,7 @@
                 <a:ea typeface="微软雅黑" pitchFamily="34" charset="-122"/>
                 <a:cs typeface="微软雅黑" pitchFamily="34" charset="-120"/>
               </a:rPr>
-              <a:t>回看数组</a:t>
+              <a:t>板书推演</a:t>
             </a:r>
             <a:endParaRPr lang="en-US" sz="1400" dirty="0"/>
           </a:p>
@@ -2732,7 +2880,7 @@
                 <a:ea typeface="微软雅黑" pitchFamily="34" charset="-122"/>
                 <a:cs typeface="微软雅黑" pitchFamily="34" charset="-120"/>
               </a:rPr>
-              <a:t>数组名就是首元素的地址，下标从0的答案在这</a:t>
+              <a:t>从零推演：声明指针并顺着它改值</a:t>
             </a:r>
             <a:endParaRPr lang="en-US" sz="2800" dirty="0"/>
           </a:p>
@@ -2740,39 +2888,14 @@
       </p:sp>
       <p:sp>
         <p:nvSpPr>
-          <p:cNvPr id="5" name="Shape 3"/>
-          <p:cNvSpPr/>
-          <p:nvPr/>
-        </p:nvSpPr>
-        <p:spPr>
-          <a:xfrm>
-            <a:off x="822960" y="2395728"/>
-            <a:ext cx="10545775" cy="1271016"/>
-          </a:xfrm>
-          <a:prstGeom prst="rect">
-            <a:avLst/>
-          </a:prstGeom>
-          <a:solidFill>
-            <a:srgbClr val="F5F6F7"/>
-          </a:solidFill>
-          <a:ln w="9525">
-            <a:solidFill>
-              <a:srgbClr val="D8DBE0"/>
-            </a:solidFill>
-            <a:prstDash val="solid"/>
-          </a:ln>
-        </p:spPr>
-      </p:sp>
-      <p:sp>
-        <p:nvSpPr>
-          <p:cNvPr id="6" name="Text 4"/>
-          <p:cNvSpPr/>
-          <p:nvPr/>
-        </p:nvSpPr>
-        <p:spPr>
-          <a:xfrm>
-            <a:off x="1078992" y="2505456"/>
-            <a:ext cx="10033711" cy="1051560"/>
+          <p:cNvPr id="5" name="Text 3"/>
+          <p:cNvSpPr/>
+          <p:nvPr/>
+        </p:nvSpPr>
+        <p:spPr>
+          <a:xfrm>
+            <a:off x="822960" y="2194560"/>
+            <a:ext cx="10545775" cy="685800"/>
           </a:xfrm>
           <a:prstGeom prst="rect">
             <a:avLst/>
@@ -2785,95 +2908,58 @@
           <a:lstStyle/>
           <a:p>
             <a:pPr algn="l" indent="0" marL="0">
-              <a:lnSpc>
-                <a:spcPct val="125000"/>
-              </a:lnSpc>
-              <a:buNone/>
-            </a:pPr>
-            <a:r>
-              <a:rPr lang="en-US" sz="1400" dirty="0">
+              <a:buNone/>
+            </a:pPr>
+            <a:r>
+              <a:rPr lang="en-US" sz="1600" dirty="0">
                 <a:solidFill>
                   <a:srgbClr val="1F2329"/>
-                </a:solidFill>
-                <a:latin typeface="Consolas" pitchFamily="34" charset="0"/>
-                <a:ea typeface="Consolas" pitchFamily="34" charset="-122"/>
-                <a:cs typeface="Consolas" pitchFamily="34" charset="-120"/>
-              </a:rPr>
-              <a:t>int a[5] = {10, 20, 30, 40, 50};
-printf("%p", a);      // 数组名a就是首元素a[0]的地址
-printf("%d", *(a + 2));   // 30：a[i] 就是 *(a+i)
-</a:t>
-            </a:r>
-            <a:endParaRPr lang="en-US" sz="1400" dirty="0"/>
-          </a:p>
-        </p:txBody>
-      </p:sp>
-      <p:sp>
-        <p:nvSpPr>
-          <p:cNvPr id="7" name="Text 5"/>
-          <p:cNvSpPr/>
-          <p:nvPr/>
-        </p:nvSpPr>
-        <p:spPr>
-          <a:xfrm>
-            <a:off x="896112" y="3867912"/>
-            <a:ext cx="10454335" cy="397764"/>
-          </a:xfrm>
-          <a:prstGeom prst="rect">
-            <a:avLst/>
-          </a:prstGeom>
-          <a:noFill/>
-          <a:ln/>
-        </p:spPr>
-        <p:txBody>
-          <a:bodyPr wrap="square" rtlCol="0" anchor="t"/>
-          <a:lstStyle/>
-          <a:p>
-            <a:pPr algn="l" indent="0" marL="0">
-              <a:lnSpc>
-                <a:spcPct val="115000"/>
-              </a:lnSpc>
-              <a:buNone/>
-            </a:pPr>
-            <a:r>
-              <a:rPr lang="en-US" sz="1800" b="1" dirty="0">
-                <a:solidFill>
-                  <a:srgbClr val="1F4E9C"/>
                 </a:solidFill>
                 <a:latin typeface="微软雅黑" pitchFamily="34" charset="0"/>
                 <a:ea typeface="微软雅黑" pitchFamily="34" charset="-122"/>
                 <a:cs typeface="微软雅黑" pitchFamily="34" charset="-120"/>
               </a:rPr>
-              <a:t>•  </a:t>
-            </a:r>
-            <a:pPr algn="l" indent="0" marL="0">
-              <a:lnSpc>
-                <a:spcPct val="115000"/>
-              </a:lnSpc>
-              <a:buNone/>
-            </a:pPr>
-            <a:r>
-              <a:rPr lang="en-US" sz="1800" dirty="0">
-                <a:solidFill>
-                  <a:srgbClr val="000000"/>
-                </a:solidFill>
-              </a:rPr>
-              <a:t>数组的格子连成一片，a指向第一格，a+1指向第二格</a:t>
-            </a:r>
-            <a:endParaRPr lang="en-US" sz="1800" dirty="0"/>
-          </a:p>
-        </p:txBody>
-      </p:sp>
-      <p:sp>
-        <p:nvSpPr>
-          <p:cNvPr id="8" name="Text 6"/>
-          <p:cNvSpPr/>
-          <p:nvPr/>
-        </p:nvSpPr>
-        <p:spPr>
-          <a:xfrm>
-            <a:off x="896112" y="4338828"/>
-            <a:ext cx="10454335" cy="397764"/>
+              <a:t>任务：画内存格子推演四步。① 画格子x，值10（编号随手写如1000）；② 画指针p，把x的编号写进p，箭头指向x；③ 写 *p，读出10；④ 写 *p = 20，把格子里的10改成20。只画格子、编号、值、箭头，不写程序骨架</a:t>
+            </a:r>
+            <a:endParaRPr lang="en-US" sz="1600" dirty="0"/>
+          </a:p>
+        </p:txBody>
+      </p:sp>
+      <p:sp>
+        <p:nvSpPr>
+          <p:cNvPr id="6" name="Shape 4"/>
+          <p:cNvSpPr/>
+          <p:nvPr/>
+        </p:nvSpPr>
+        <p:spPr>
+          <a:xfrm>
+            <a:off x="822960" y="3017520"/>
+            <a:ext cx="10545775" cy="2788920"/>
+          </a:xfrm>
+          <a:prstGeom prst="rect">
+            <a:avLst/>
+          </a:prstGeom>
+          <a:solidFill>
+            <a:srgbClr val="FFFFFF"/>
+          </a:solidFill>
+          <a:ln w="12700">
+            <a:solidFill>
+              <a:srgbClr val="B9C0C9"/>
+            </a:solidFill>
+            <a:prstDash val="dash"/>
+          </a:ln>
+        </p:spPr>
+      </p:sp>
+      <p:sp>
+        <p:nvSpPr>
+          <p:cNvPr id="7" name="Text 5"/>
+          <p:cNvSpPr/>
+          <p:nvPr/>
+        </p:nvSpPr>
+        <p:spPr>
+          <a:xfrm>
+            <a:off x="822960" y="5349240"/>
+            <a:ext cx="10545775" cy="365760"/>
           </a:xfrm>
           <a:prstGeom prst="rect">
             <a:avLst/>
@@ -2882,125 +2968,24 @@
           <a:ln/>
         </p:spPr>
         <p:txBody>
-          <a:bodyPr wrap="square" rtlCol="0" anchor="t"/>
-          <a:lstStyle/>
-          <a:p>
-            <a:pPr algn="l" indent="0" marL="0">
-              <a:lnSpc>
-                <a:spcPct val="115000"/>
-              </a:lnSpc>
-              <a:buNone/>
-            </a:pPr>
-            <a:r>
-              <a:rPr lang="en-US" sz="1800" b="1" dirty="0">
-                <a:solidFill>
-                  <a:srgbClr val="1F4E9C"/>
+          <a:bodyPr wrap="square" rtlCol="0" anchor="ctr"/>
+          <a:lstStyle/>
+          <a:p>
+            <a:pPr algn="r" indent="0" marL="0">
+              <a:buNone/>
+            </a:pPr>
+            <a:r>
+              <a:rPr lang="en-US" sz="1200" dirty="0">
+                <a:solidFill>
+                  <a:srgbClr val="8A9099"/>
                 </a:solidFill>
                 <a:latin typeface="微软雅黑" pitchFamily="34" charset="0"/>
                 <a:ea typeface="微软雅黑" pitchFamily="34" charset="-122"/>
                 <a:cs typeface="微软雅黑" pitchFamily="34" charset="-120"/>
               </a:rPr>
-              <a:t>•  </a:t>
-            </a:r>
-            <a:pPr algn="l" indent="0" marL="0">
-              <a:lnSpc>
-                <a:spcPct val="115000"/>
-              </a:lnSpc>
-              <a:buNone/>
-            </a:pPr>
-            <a:r>
-              <a:rPr lang="en-US" sz="1800" dirty="0">
-                <a:solidFill>
-                  <a:srgbClr val="000000"/>
-                </a:solidFill>
-              </a:rPr>
-              <a:t>a[2]的写法等价于*(a+2)：从起点数2格——</a:t>
-            </a:r>
-            <a:pPr algn="l" indent="0" marL="0">
-              <a:lnSpc>
-                <a:spcPct val="115000"/>
-              </a:lnSpc>
-              <a:buNone/>
-            </a:pPr>
-            <a:r>
-              <a:rPr lang="en-US" sz="1800" b="1" dirty="0">
-                <a:solidFill>
-                  <a:srgbClr val="000000"/>
-                </a:solidFill>
-              </a:rPr>
-              <a:t>所以下标从0开始</a:t>
-            </a:r>
-            <a:pPr algn="l" indent="0" marL="0">
-              <a:lnSpc>
-                <a:spcPct val="115000"/>
-              </a:lnSpc>
-              <a:buNone/>
-            </a:pPr>
-            <a:r>
-              <a:rPr lang="en-US" sz="1800" dirty="0">
-                <a:solidFill>
-                  <a:srgbClr val="000000"/>
-                </a:solidFill>
-              </a:rPr>
-              <a:t>，0表示起点自己</a:t>
-            </a:r>
-            <a:endParaRPr lang="en-US" sz="1800" dirty="0"/>
-          </a:p>
-        </p:txBody>
-      </p:sp>
-      <p:sp>
-        <p:nvSpPr>
-          <p:cNvPr id="9" name="Text 7"/>
-          <p:cNvSpPr/>
-          <p:nvPr/>
-        </p:nvSpPr>
-        <p:spPr>
-          <a:xfrm>
-            <a:off x="896112" y="4809744"/>
-            <a:ext cx="10454335" cy="397764"/>
-          </a:xfrm>
-          <a:prstGeom prst="rect">
-            <a:avLst/>
-          </a:prstGeom>
-          <a:noFill/>
-          <a:ln/>
-        </p:spPr>
-        <p:txBody>
-          <a:bodyPr wrap="square" rtlCol="0" anchor="t"/>
-          <a:lstStyle/>
-          <a:p>
-            <a:pPr algn="l" indent="0" marL="0">
-              <a:lnSpc>
-                <a:spcPct val="115000"/>
-              </a:lnSpc>
-              <a:buNone/>
-            </a:pPr>
-            <a:r>
-              <a:rPr lang="en-US" sz="1800" b="1" dirty="0">
-                <a:solidFill>
-                  <a:srgbClr val="1F4E9C"/>
-                </a:solidFill>
-                <a:latin typeface="微软雅黑" pitchFamily="34" charset="0"/>
-                <a:ea typeface="微软雅黑" pitchFamily="34" charset="-122"/>
-                <a:cs typeface="微软雅黑" pitchFamily="34" charset="-120"/>
-              </a:rPr>
-              <a:t>•  </a:t>
-            </a:r>
-            <a:pPr algn="l" indent="0" marL="0">
-              <a:lnSpc>
-                <a:spcPct val="115000"/>
-              </a:lnSpc>
-              <a:buNone/>
-            </a:pPr>
-            <a:r>
-              <a:rPr lang="en-US" sz="1800" dirty="0">
-                <a:solidFill>
-                  <a:srgbClr val="000000"/>
-                </a:solidFill>
-              </a:rPr>
-              <a:t>遍历数组的for（i从0到n-1），本质就是指针一格一格往后走</a:t>
-            </a:r>
-            <a:endParaRPr lang="en-US" sz="1800" dirty="0"/>
+              <a:t>此处板书推演</a:t>
+            </a:r>
+            <a:endParaRPr lang="en-US" sz="1200" dirty="0"/>
           </a:p>
         </p:txBody>
       </p:sp>
@@ -3115,7 +3100,7 @@
                 <a:ea typeface="微软雅黑" pitchFamily="34" charset="-122"/>
                 <a:cs typeface="微软雅黑" pitchFamily="34" charset="-120"/>
               </a:rPr>
-              <a:t>本节难忘时刻</a:t>
+              <a:t>指针的规矩</a:t>
             </a:r>
             <a:endParaRPr lang="en-US" sz="1400" dirty="0"/>
           </a:p>
@@ -3154,7 +3139,7 @@
                 <a:ea typeface="微软雅黑" pitchFamily="34" charset="-122"/>
                 <a:cs typeface="微软雅黑" pitchFamily="34" charset="-120"/>
               </a:rPr>
-              <a:t>越界：踩进了别人的格子</a:t>
+              <a:t>指针有类型，p自己也有地址</a:t>
             </a:r>
             <a:endParaRPr lang="en-US" sz="2800" dirty="0"/>
           </a:p>
@@ -3162,84 +3147,14 @@
       </p:sp>
       <p:sp>
         <p:nvSpPr>
-          <p:cNvPr id="5" name="Shape 3"/>
-          <p:cNvSpPr/>
-          <p:nvPr/>
-        </p:nvSpPr>
-        <p:spPr>
-          <a:xfrm>
-            <a:off x="822960" y="2395728"/>
-            <a:ext cx="10545775" cy="1271016"/>
-          </a:xfrm>
-          <a:prstGeom prst="rect">
-            <a:avLst/>
-          </a:prstGeom>
-          <a:solidFill>
-            <a:srgbClr val="F5F6F7"/>
-          </a:solidFill>
-          <a:ln w="9525">
-            <a:solidFill>
-              <a:srgbClr val="D8DBE0"/>
-            </a:solidFill>
-            <a:prstDash val="solid"/>
-          </a:ln>
-        </p:spPr>
-      </p:sp>
-      <p:sp>
-        <p:nvSpPr>
-          <p:cNvPr id="6" name="Text 4"/>
-          <p:cNvSpPr/>
-          <p:nvPr/>
-        </p:nvSpPr>
-        <p:spPr>
-          <a:xfrm>
-            <a:off x="1078992" y="2505456"/>
-            <a:ext cx="10033711" cy="1051560"/>
-          </a:xfrm>
-          <a:prstGeom prst="rect">
-            <a:avLst/>
-          </a:prstGeom>
-          <a:noFill/>
-          <a:ln/>
-        </p:spPr>
-        <p:txBody>
-          <a:bodyPr wrap="square" rtlCol="0" anchor="t"/>
-          <a:lstStyle/>
-          <a:p>
-            <a:pPr algn="l" indent="0" marL="0">
-              <a:lnSpc>
-                <a:spcPct val="125000"/>
-              </a:lnSpc>
-              <a:buNone/>
-            </a:pPr>
-            <a:r>
-              <a:rPr lang="en-US" sz="1400" dirty="0">
-                <a:solidFill>
-                  <a:srgbClr val="1F2329"/>
-                </a:solidFill>
-                <a:latin typeface="Consolas" pitchFamily="34" charset="0"/>
-                <a:ea typeface="Consolas" pitchFamily="34" charset="-122"/>
-                <a:cs typeface="Consolas" pitchFamily="34" charset="-120"/>
-              </a:rPr>
-              <a:t>int a[5] = {10, 20, 30, 40, 50};
-int b = 100;
-a[5] = 999;           // 没有a[5]这一格：写进了别的变量的地盘
-</a:t>
-            </a:r>
-            <a:endParaRPr lang="en-US" sz="1400" dirty="0"/>
-          </a:p>
-        </p:txBody>
-      </p:sp>
-      <p:sp>
-        <p:nvSpPr>
-          <p:cNvPr id="7" name="Text 5"/>
-          <p:cNvSpPr/>
-          <p:nvPr/>
-        </p:nvSpPr>
-        <p:spPr>
-          <a:xfrm>
-            <a:off x="896112" y="3867912"/>
-            <a:ext cx="10454335" cy="397764"/>
+          <p:cNvPr id="5" name="Text 3"/>
+          <p:cNvSpPr/>
+          <p:nvPr/>
+        </p:nvSpPr>
+        <p:spPr>
+          <a:xfrm>
+            <a:off x="896112" y="2395728"/>
+            <a:ext cx="10454335" cy="740664"/>
           </a:xfrm>
           <a:prstGeom prst="rect">
             <a:avLst/>
@@ -3280,7 +3195,7 @@
                   <a:srgbClr val="000000"/>
                 </a:solidFill>
               </a:rPr>
-              <a:t>a[5]只有下标0—4这五格，a[5]是第六格——那片内存住着别的变量</a:t>
+              <a:t>int *只存int的地址，char *只存char的地址：类型告诉编译器，指向的盒子多大</a:t>
             </a:r>
             <a:endParaRPr lang="en-US" sz="1800" dirty="0"/>
           </a:p>
@@ -3288,13 +3203,13 @@
       </p:sp>
       <p:sp>
         <p:nvSpPr>
-          <p:cNvPr id="8" name="Text 6"/>
-          <p:cNvSpPr/>
-          <p:nvPr/>
-        </p:nvSpPr>
-        <p:spPr>
-          <a:xfrm>
-            <a:off x="896112" y="4338828"/>
+          <p:cNvPr id="6" name="Text 4"/>
+          <p:cNvSpPr/>
+          <p:nvPr/>
+        </p:nvSpPr>
+        <p:spPr>
+          <a:xfrm>
+            <a:off x="896112" y="3209544"/>
             <a:ext cx="10454335" cy="397764"/>
           </a:xfrm>
           <a:prstGeom prst="rect">
@@ -3336,7 +3251,7 @@
                   <a:srgbClr val="000000"/>
                 </a:solidFill>
               </a:rPr>
-              <a:t>编译器多半不报错，值就这么被悄悄改掉，错得无声无息</a:t>
+              <a:t>p自己也是变量，也住格子：改*p改的是x那格，改p改的是它自己存的编号</a:t>
             </a:r>
             <a:endParaRPr lang="en-US" sz="1800" dirty="0"/>
           </a:p>
@@ -3344,13 +3259,13 @@
       </p:sp>
       <p:sp>
         <p:nvSpPr>
-          <p:cNvPr id="9" name="Text 7"/>
-          <p:cNvSpPr/>
-          <p:nvPr/>
-        </p:nvSpPr>
-        <p:spPr>
-          <a:xfrm>
-            <a:off x="896112" y="4809744"/>
+          <p:cNvPr id="7" name="Text 5"/>
+          <p:cNvSpPr/>
+          <p:nvPr/>
+        </p:nvSpPr>
+        <p:spPr>
+          <a:xfrm>
+            <a:off x="896112" y="3680460"/>
             <a:ext cx="10454335" cy="397764"/>
           </a:xfrm>
           <a:prstGeom prst="rect">
@@ -3392,21 +3307,7 @@
                   <a:srgbClr val="000000"/>
                 </a:solidFill>
               </a:rPr>
-              <a:t>这就是"越界危险"的真正原因：</a:t>
-            </a:r>
-            <a:pPr algn="l" indent="0" marL="0">
-              <a:lnSpc>
-                <a:spcPct val="115000"/>
-              </a:lnSpc>
-              <a:buNone/>
-            </a:pPr>
-            <a:r>
-              <a:rPr lang="en-US" sz="1800" b="1" dirty="0">
-                <a:solidFill>
-                  <a:srgbClr val="000000"/>
-                </a:solidFill>
-              </a:rPr>
-              <a:t>不是程序不让，是那片内存不归你</a:t>
+              <a:t>野指针一句话：没初始化的指针不许用*，要么指向真实变量，要么先赋NULL</a:t>
             </a:r>
             <a:endParaRPr lang="en-US" sz="1800" dirty="0"/>
           </a:p>
@@ -3523,7 +3424,7 @@
                 <a:ea typeface="微软雅黑" pitchFamily="34" charset="-122"/>
                 <a:cs typeface="微软雅黑" pitchFamily="34" charset="-120"/>
               </a:rPr>
-              <a:t>两个真实的坑</a:t>
+              <a:t>方法固化</a:t>
             </a:r>
             <a:endParaRPr lang="en-US" sz="1400" dirty="0"/>
           </a:p>
@@ -3562,7 +3463,7 @@
                 <a:ea typeface="微软雅黑" pitchFamily="34" charset="-122"/>
                 <a:cs typeface="微软雅黑" pitchFamily="34" charset="-120"/>
               </a:rPr>
-              <a:t>scanf吃回车与野指针</a:t>
+              <a:t>读指针代码的笨办法，但是好用</a:t>
             </a:r>
             <a:endParaRPr lang="en-US" sz="2800" dirty="0"/>
           </a:p>
@@ -3570,85 +3471,13 @@
       </p:sp>
       <p:sp>
         <p:nvSpPr>
-          <p:cNvPr id="5" name="Shape 3"/>
-          <p:cNvSpPr/>
-          <p:nvPr/>
-        </p:nvSpPr>
-        <p:spPr>
-          <a:xfrm>
-            <a:off x="822960" y="2395728"/>
-            <a:ext cx="10545775" cy="1746504"/>
-          </a:xfrm>
-          <a:prstGeom prst="rect">
-            <a:avLst/>
-          </a:prstGeom>
-          <a:solidFill>
-            <a:srgbClr val="F5F6F7"/>
-          </a:solidFill>
-          <a:ln w="9525">
-            <a:solidFill>
-              <a:srgbClr val="D8DBE0"/>
-            </a:solidFill>
-            <a:prstDash val="solid"/>
-          </a:ln>
-        </p:spPr>
-      </p:sp>
-      <p:sp>
-        <p:nvSpPr>
-          <p:cNvPr id="6" name="Text 4"/>
-          <p:cNvSpPr/>
-          <p:nvPr/>
-        </p:nvSpPr>
-        <p:spPr>
-          <a:xfrm>
-            <a:off x="1078992" y="2505456"/>
-            <a:ext cx="10033711" cy="1527048"/>
-          </a:xfrm>
-          <a:prstGeom prst="rect">
-            <a:avLst/>
-          </a:prstGeom>
-          <a:noFill/>
-          <a:ln/>
-        </p:spPr>
-        <p:txBody>
-          <a:bodyPr wrap="square" rtlCol="0" anchor="t"/>
-          <a:lstStyle/>
-          <a:p>
-            <a:pPr algn="l" indent="0" marL="0">
-              <a:lnSpc>
-                <a:spcPct val="125000"/>
-              </a:lnSpc>
-              <a:buNone/>
-            </a:pPr>
-            <a:r>
-              <a:rPr lang="en-US" sz="1400" dirty="0">
-                <a:solidFill>
-                  <a:srgbClr val="1F2329"/>
-                </a:solidFill>
-                <a:latin typeface="Consolas" pitchFamily="34" charset="0"/>
-                <a:ea typeface="Consolas" pitchFamily="34" charset="-122"/>
-                <a:cs typeface="Consolas" pitchFamily="34" charset="-120"/>
-              </a:rPr>
-              <a:t>int n;
-char ch;
-scanf("%d", &amp;n);
-ch = getchar();       // 收走敲数字留下的回车
-scanf("%c", &amp;ch);     // 或者写成 scanf(" %c", &amp;ch); 空格挡掉空白
-</a:t>
-            </a:r>
-            <a:endParaRPr lang="en-US" sz="1400" dirty="0"/>
-          </a:p>
-        </p:txBody>
-      </p:sp>
-      <p:sp>
-        <p:nvSpPr>
-          <p:cNvPr id="7" name="Text 5"/>
-          <p:cNvSpPr/>
-          <p:nvPr/>
-        </p:nvSpPr>
-        <p:spPr>
-          <a:xfrm>
-            <a:off x="896112" y="4343400"/>
+          <p:cNvPr id="5" name="Text 3"/>
+          <p:cNvSpPr/>
+          <p:nvPr/>
+        </p:nvSpPr>
+        <p:spPr>
+          <a:xfrm>
+            <a:off x="896112" y="2395728"/>
             <a:ext cx="10454335" cy="397764"/>
           </a:xfrm>
           <a:prstGeom prst="rect">
@@ -3690,7 +3519,7 @@
                   <a:srgbClr val="000000"/>
                 </a:solidFill>
               </a:rPr>
-              <a:t>先读数字再读字符时，残留的回车会被%c收走；两种救法记住一种即可</a:t>
+              <a:t>见到&amp;就念"取地址"，见到*就念"取值"，见到指针移动就想象箭头挪一格</a:t>
             </a:r>
             <a:endParaRPr lang="en-US" sz="1800" dirty="0"/>
           </a:p>
@@ -3698,13 +3527,13 @@
       </p:sp>
       <p:sp>
         <p:nvSpPr>
-          <p:cNvPr id="8" name="Text 6"/>
-          <p:cNvSpPr/>
-          <p:nvPr/>
-        </p:nvSpPr>
-        <p:spPr>
-          <a:xfrm>
-            <a:off x="896112" y="4814316"/>
+          <p:cNvPr id="6" name="Text 4"/>
+          <p:cNvSpPr/>
+          <p:nvPr/>
+        </p:nvSpPr>
+        <p:spPr>
+          <a:xfrm>
+            <a:off x="896112" y="2866644"/>
             <a:ext cx="10454335" cy="397764"/>
           </a:xfrm>
           <a:prstGeom prst="rect">
@@ -3746,8 +3575,33 @@
                   <a:srgbClr val="000000"/>
                 </a:solidFill>
               </a:rPr>
-              <a:t>野指针：声明了没初始化的指针，*p是往</a:t>
-            </a:r>
+              <a:t>三个动作翻译下来，再绕的代码也能拆成一步步的格子操作</a:t>
+            </a:r>
+            <a:endParaRPr lang="en-US" sz="1800" dirty="0"/>
+          </a:p>
+        </p:txBody>
+      </p:sp>
+      <p:sp>
+        <p:nvSpPr>
+          <p:cNvPr id="7" name="Text 5"/>
+          <p:cNvSpPr/>
+          <p:nvPr/>
+        </p:nvSpPr>
+        <p:spPr>
+          <a:xfrm>
+            <a:off x="896112" y="3337560"/>
+            <a:ext cx="10454335" cy="397764"/>
+          </a:xfrm>
+          <a:prstGeom prst="rect">
+            <a:avLst/>
+          </a:prstGeom>
+          <a:noFill/>
+          <a:ln/>
+        </p:spPr>
+        <p:txBody>
+          <a:bodyPr wrap="square" rtlCol="0" anchor="t"/>
+          <a:lstStyle/>
+          <a:p>
             <a:pPr algn="l" indent="0" marL="0">
               <a:lnSpc>
                 <a:spcPct val="115000"/>
@@ -3757,10 +3611,13 @@
             <a:r>
               <a:rPr lang="en-US" sz="1800" b="1" dirty="0">
                 <a:solidFill>
-                  <a:srgbClr val="000000"/>
-                </a:solidFill>
-              </a:rPr>
-              <a:t>没人知道的地方</a:t>
+                  <a:srgbClr val="1F4E9C"/>
+                </a:solidFill>
+                <a:latin typeface="微软雅黑" pitchFamily="34" charset="0"/>
+                <a:ea typeface="微软雅黑" pitchFamily="34" charset="-122"/>
+                <a:cs typeface="微软雅黑" pitchFamily="34" charset="-120"/>
+              </a:rPr>
+              <a:t>•  </a:t>
             </a:r>
             <a:pPr algn="l" indent="0" marL="0">
               <a:lnSpc>
@@ -3774,7 +3631,7 @@
                   <a:srgbClr val="000000"/>
                 </a:solidFill>
               </a:rPr>
-              <a:t>写东西，比越界更危险</a:t>
+              <a:t>程序阅读题里的指针挖空，就用这个法子一格一格走</a:t>
             </a:r>
             <a:endParaRPr lang="en-US" sz="1800" dirty="0"/>
           </a:p>
@@ -3782,14 +3639,14 @@
       </p:sp>
       <p:sp>
         <p:nvSpPr>
-          <p:cNvPr id="9" name="Text 7"/>
-          <p:cNvSpPr/>
-          <p:nvPr/>
-        </p:nvSpPr>
-        <p:spPr>
-          <a:xfrm>
-            <a:off x="896112" y="5285232"/>
-            <a:ext cx="10454335" cy="397764"/>
+          <p:cNvPr id="8" name="Text 6"/>
+          <p:cNvSpPr/>
+          <p:nvPr/>
+        </p:nvSpPr>
+        <p:spPr>
+          <a:xfrm>
+            <a:off x="822960" y="3899916"/>
+            <a:ext cx="10545775" cy="358902"/>
           </a:xfrm>
           <a:prstGeom prst="rect">
             <a:avLst/>
@@ -3802,37 +3659,20 @@
           <a:lstStyle/>
           <a:p>
             <a:pPr algn="l" indent="0" marL="0">
-              <a:lnSpc>
-                <a:spcPct val="115000"/>
-              </a:lnSpc>
-              <a:buNone/>
-            </a:pPr>
-            <a:r>
-              <a:rPr lang="en-US" sz="1800" b="1" dirty="0">
-                <a:solidFill>
-                  <a:srgbClr val="1F4E9C"/>
+              <a:buNone/>
+            </a:pPr>
+            <a:r>
+              <a:rPr lang="en-US" sz="1500" dirty="0">
+                <a:solidFill>
+                  <a:srgbClr val="8A9099"/>
                 </a:solidFill>
                 <a:latin typeface="微软雅黑" pitchFamily="34" charset="0"/>
                 <a:ea typeface="微软雅黑" pitchFamily="34" charset="-122"/>
                 <a:cs typeface="微软雅黑" pitchFamily="34" charset="-120"/>
               </a:rPr>
-              <a:t>•  </a:t>
-            </a:r>
-            <a:pPr algn="l" indent="0" marL="0">
-              <a:lnSpc>
-                <a:spcPct val="115000"/>
-              </a:lnSpc>
-              <a:buNone/>
-            </a:pPr>
-            <a:r>
-              <a:rPr lang="en-US" sz="1800" dirty="0">
-                <a:solidFill>
-                  <a:srgbClr val="000000"/>
-                </a:solidFill>
-              </a:rPr>
-              <a:t>规矩只有一条：指针不初始化，就不许用*</a:t>
-            </a:r>
-            <a:endParaRPr lang="en-US" sz="1800" dirty="0"/>
+              <a:t>遇到读不顺的代码，先画内存图再读，比盯着一行字硬想快得多</a:t>
+            </a:r>
+            <a:endParaRPr lang="en-US" sz="1500" dirty="0"/>
           </a:p>
         </p:txBody>
       </p:sp>
@@ -4098,7 +3938,7 @@
                   <a:srgbClr val="000000"/>
                 </a:solidFill>
               </a:rPr>
-              <a:t>数组名是首元素地址，a[i]就是*(a+i)，下标从0是因为0表示起点</a:t>
+              <a:t>scanf要写&amp;：它得拿着门牌号才能把数据放对地方</a:t>
             </a:r>
             <a:endParaRPr lang="en-US" sz="1800" dirty="0"/>
           </a:p>
@@ -4154,7 +3994,7 @@
                   <a:srgbClr val="000000"/>
                 </a:solidFill>
               </a:rPr>
-              <a:t>指针不初始化不许用；越界是踩进别人的内存</a:t>
+              <a:t>指针是存地址的变量；*p和x是同一格内存的两个名字</a:t>
             </a:r>
             <a:endParaRPr lang="en-US" sz="1800" dirty="0"/>
           </a:p>
@@ -4193,7 +4033,7 @@
                 <a:ea typeface="微软雅黑" pitchFamily="34" charset="-122"/>
                 <a:cs typeface="微软雅黑" pitchFamily="34" charset="-120"/>
               </a:rPr>
-              <a:t>下一节：结构体与typedef，数据结构的结点就是用它们定义的</a:t>
+              <a:t>下一节：指针运算与数组，把数组和指针放到一起看</a:t>
             </a:r>
             <a:endParaRPr lang="en-US" sz="1500" dirty="0"/>
           </a:p>
@@ -4419,7 +4259,7 @@
                   <a:srgbClr val="000000"/>
                 </a:solidFill>
               </a:rPr>
-              <a:t>：声明int x=10和指向它的指针p，用*p把x改成25并打印，再画内存图标出每一步</a:t>
+              <a:t>：声明int x=10和指向它的指针p，用*p把x改成25并打印，画出每一步的内存图</a:t>
             </a:r>
             <a:endParaRPr lang="en-US" sz="1800" dirty="0"/>
           </a:p>
@@ -4489,7 +4329,7 @@
                   <a:srgbClr val="000000"/>
                 </a:solidFill>
               </a:rPr>
-              <a:t>：声明int a[4]={1,2,3,4}，只用指针p从a走到a+3，依次打印四个元素</a:t>
+              <a:t>：声明int x=10、int y=20、int *p=&amp;x，用一句p=&amp;y让p改指向y，打印*p</a:t>
             </a:r>
             <a:endParaRPr lang="en-US" sz="1800" dirty="0"/>
           </a:p>
@@ -4545,7 +4385,7 @@
                   <a:srgbClr val="000000"/>
                 </a:solidFill>
               </a:rPr>
-              <a:t>要求：两道题先写在纸上再上机验证；合上资料能默写 int *p = &amp;x; 和 *(a+i)</a:t>
+              <a:t>要求：两道题先写在纸上再上机验证；合上资料能默写 int *p = &amp;x; 和 *p = 25;</a:t>
             </a:r>
             <a:endParaRPr lang="en-US" sz="1800" dirty="0"/>
           </a:p>
@@ -5376,7 +5216,7 @@
                   <a:srgbClr val="000000"/>
                 </a:solidFill>
               </a:rPr>
-              <a:t>C2的链表、树、图代码默认你会本阶段内容，不再回头补</a:t>
+              <a:t>数据结构课的链表、树、图代码默认你会本阶段内容，不再回头补</a:t>
             </a:r>
             <a:endParaRPr lang="en-US" sz="1800" dirty="0"/>
           </a:p>
@@ -5598,7 +5438,7 @@
                 <a:ea typeface="微软雅黑" pitchFamily="34" charset="-122"/>
                 <a:cs typeface="微软雅黑" pitchFamily="34" charset="-120"/>
               </a:rPr>
-              <a:t>强化阶段四节课</a:t>
+              <a:t>强化阶段六节课</a:t>
             </a:r>
             <a:endParaRPr lang="en-US" sz="2800" dirty="0"/>
           </a:p>
@@ -5923,7 +5763,7 @@
                           <a:ea typeface="微软雅黑" pitchFamily="34" charset="-122"/>
                           <a:cs typeface="微软雅黑" pitchFamily="34" charset="-120"/>
                         </a:rPr>
-                        <a:t>指针入门与数组</a:t>
+                        <a:t>地址与指针入门</a:t>
                       </a:r>
                       <a:endParaRPr lang="en-US" sz="1500" dirty="0">
                         <a:latin typeface="微软雅黑" charset="0"/>
@@ -5991,7 +5831,7 @@
                           <a:ea typeface="微软雅黑" pitchFamily="34" charset="-122"/>
                           <a:cs typeface="微软雅黑" pitchFamily="34" charset="-120"/>
                         </a:rPr>
-                        <a:t>看懂地址与指针，明白数组下标的本质</a:t>
+                        <a:t>看懂地址与指针，会画内存图</a:t>
                       </a:r>
                       <a:endParaRPr lang="en-US" sz="1500" dirty="0">
                         <a:latin typeface="微软雅黑" charset="0"/>
@@ -6129,7 +5969,7 @@
                           <a:ea typeface="微软雅黑" pitchFamily="34" charset="-122"/>
                           <a:cs typeface="微软雅黑" pitchFamily="34" charset="-120"/>
                         </a:rPr>
-                        <a:t>结构体与typedef</a:t>
+                        <a:t>指针运算与数组</a:t>
                       </a:r>
                       <a:endParaRPr lang="en-US" sz="1500" dirty="0">
                         <a:latin typeface="微软雅黑" charset="0"/>
@@ -6197,7 +6037,7 @@
                           <a:ea typeface="微软雅黑" pitchFamily="34" charset="-122"/>
                           <a:cs typeface="微软雅黑" pitchFamily="34" charset="-120"/>
                         </a:rPr>
-                        <a:t>会定义结构体，看懂-&gt;与typedef</a:t>
+                        <a:t>明白数组下标的本质，会用指针遍历</a:t>
                       </a:r>
                       <a:endParaRPr lang="en-US" sz="1500" dirty="0">
                         <a:latin typeface="微软雅黑" charset="0"/>
@@ -6335,7 +6175,7 @@
                           <a:ea typeface="微软雅黑" pitchFamily="34" charset="-122"/>
                           <a:cs typeface="微软雅黑" pitchFamily="34" charset="-120"/>
                         </a:rPr>
-                        <a:t>动态内存与引用</a:t>
+                        <a:t>结构体与typedef</a:t>
                       </a:r>
                       <a:endParaRPr lang="en-US" sz="1500" dirty="0">
                         <a:latin typeface="微软雅黑" charset="0"/>
@@ -6403,7 +6243,7 @@
                           <a:ea typeface="微软雅黑" pitchFamily="34" charset="-122"/>
                           <a:cs typeface="微软雅黑" pitchFamily="34" charset="-120"/>
                         </a:rPr>
-                        <a:t>会用malloc，看懂伪代码里的&amp;传参</a:t>
+                        <a:t>会定义结构体，看懂-&gt;与typedef</a:t>
                       </a:r>
                       <a:endParaRPr lang="en-US" sz="1500" dirty="0">
                         <a:latin typeface="微软雅黑" charset="0"/>
@@ -6474,6 +6314,418 @@
                           <a:cs typeface="微软雅黑" pitchFamily="34" charset="-120"/>
                         </a:rPr>
                         <a:t>第4节</a:t>
+                      </a:r>
+                      <a:endParaRPr lang="en-US" sz="1500" dirty="0">
+                        <a:latin typeface="微软雅黑" charset="0"/>
+                        <a:ea typeface="微软雅黑" charset="0"/>
+                        <a:cs typeface="微软雅黑" charset="0"/>
+                      </a:endParaRPr>
+                    </a:p>
+                  </a:txBody>
+                  <a:tcPr marL="91440" marR="91440" marT="45720" marB="45720" anchor="ctr">
+                    <a:lnL w="9525" cap="flat" cmpd="sng" algn="ctr">
+                      <a:solidFill>
+                        <a:srgbClr val="D8DBE0"/>
+                      </a:solidFill>
+                      <a:prstDash val="solid"/>
+                      <a:round/>
+                      <a:headEnd type="none" w="med" len="med"/>
+                      <a:tailEnd type="none" w="med" len="med"/>
+                    </a:lnL>
+                    <a:lnR w="9525" cap="flat" cmpd="sng" algn="ctr">
+                      <a:solidFill>
+                        <a:srgbClr val="D8DBE0"/>
+                      </a:solidFill>
+                      <a:prstDash val="solid"/>
+                      <a:round/>
+                      <a:headEnd type="none" w="med" len="med"/>
+                      <a:tailEnd type="none" w="med" len="med"/>
+                    </a:lnR>
+                    <a:lnT w="9525" cap="flat" cmpd="sng" algn="ctr">
+                      <a:solidFill>
+                        <a:srgbClr val="D8DBE0"/>
+                      </a:solidFill>
+                      <a:prstDash val="solid"/>
+                      <a:round/>
+                      <a:headEnd type="none" w="med" len="med"/>
+                      <a:tailEnd type="none" w="med" len="med"/>
+                    </a:lnT>
+                    <a:lnB w="9525" cap="flat" cmpd="sng" algn="ctr">
+                      <a:solidFill>
+                        <a:srgbClr val="D8DBE0"/>
+                      </a:solidFill>
+                      <a:prstDash val="solid"/>
+                      <a:round/>
+                      <a:headEnd type="none" w="med" len="med"/>
+                      <a:tailEnd type="none" w="med" len="med"/>
+                    </a:lnB>
+                    <a:solidFill>
+                      <a:srgbClr val="FFFFFF"/>
+                    </a:solidFill>
+                  </a:tcPr>
+                </a:tc>
+                <a:tc>
+                  <a:txBody>
+                    <a:bodyPr/>
+                    <a:lstStyle/>
+                    <a:p>
+                      <a:pPr algn="ctr" indent="0" marL="0">
+                        <a:buNone/>
+                      </a:pPr>
+                      <a:r>
+                        <a:rPr lang="en-US" sz="1500" dirty="0">
+                          <a:solidFill>
+                            <a:srgbClr val="1F2329"/>
+                          </a:solidFill>
+                          <a:latin typeface="微软雅黑" pitchFamily="34" charset="0"/>
+                          <a:ea typeface="微软雅黑" pitchFamily="34" charset="-122"/>
+                          <a:cs typeface="微软雅黑" pitchFamily="34" charset="-120"/>
+                        </a:rPr>
+                        <a:t>动态内存</a:t>
+                      </a:r>
+                      <a:endParaRPr lang="en-US" sz="1500" dirty="0">
+                        <a:latin typeface="微软雅黑" charset="0"/>
+                        <a:ea typeface="微软雅黑" charset="0"/>
+                        <a:cs typeface="微软雅黑" charset="0"/>
+                      </a:endParaRPr>
+                    </a:p>
+                  </a:txBody>
+                  <a:tcPr marL="91440" marR="91440" marT="45720" marB="45720" anchor="ctr">
+                    <a:lnL w="9525" cap="flat" cmpd="sng" algn="ctr">
+                      <a:solidFill>
+                        <a:srgbClr val="D8DBE0"/>
+                      </a:solidFill>
+                      <a:prstDash val="solid"/>
+                      <a:round/>
+                      <a:headEnd type="none" w="med" len="med"/>
+                      <a:tailEnd type="none" w="med" len="med"/>
+                    </a:lnL>
+                    <a:lnR w="9525" cap="flat" cmpd="sng" algn="ctr">
+                      <a:solidFill>
+                        <a:srgbClr val="D8DBE0"/>
+                      </a:solidFill>
+                      <a:prstDash val="solid"/>
+                      <a:round/>
+                      <a:headEnd type="none" w="med" len="med"/>
+                      <a:tailEnd type="none" w="med" len="med"/>
+                    </a:lnR>
+                    <a:lnT w="9525" cap="flat" cmpd="sng" algn="ctr">
+                      <a:solidFill>
+                        <a:srgbClr val="D8DBE0"/>
+                      </a:solidFill>
+                      <a:prstDash val="solid"/>
+                      <a:round/>
+                      <a:headEnd type="none" w="med" len="med"/>
+                      <a:tailEnd type="none" w="med" len="med"/>
+                    </a:lnT>
+                    <a:lnB w="9525" cap="flat" cmpd="sng" algn="ctr">
+                      <a:solidFill>
+                        <a:srgbClr val="D8DBE0"/>
+                      </a:solidFill>
+                      <a:prstDash val="solid"/>
+                      <a:round/>
+                      <a:headEnd type="none" w="med" len="med"/>
+                      <a:tailEnd type="none" w="med" len="med"/>
+                    </a:lnB>
+                    <a:solidFill>
+                      <a:srgbClr val="FFFFFF"/>
+                    </a:solidFill>
+                  </a:tcPr>
+                </a:tc>
+                <a:tc>
+                  <a:txBody>
+                    <a:bodyPr/>
+                    <a:lstStyle/>
+                    <a:p>
+                      <a:pPr algn="ctr" indent="0" marL="0">
+                        <a:buNone/>
+                      </a:pPr>
+                      <a:r>
+                        <a:rPr lang="en-US" sz="1500" dirty="0">
+                          <a:solidFill>
+                            <a:srgbClr val="1F2329"/>
+                          </a:solidFill>
+                          <a:latin typeface="微软雅黑" pitchFamily="34" charset="0"/>
+                          <a:ea typeface="微软雅黑" pitchFamily="34" charset="-122"/>
+                          <a:cs typeface="微软雅黑" pitchFamily="34" charset="-120"/>
+                        </a:rPr>
+                        <a:t>会用malloc造内存、用free还内存</a:t>
+                      </a:r>
+                      <a:endParaRPr lang="en-US" sz="1500" dirty="0">
+                        <a:latin typeface="微软雅黑" charset="0"/>
+                        <a:ea typeface="微软雅黑" charset="0"/>
+                        <a:cs typeface="微软雅黑" charset="0"/>
+                      </a:endParaRPr>
+                    </a:p>
+                  </a:txBody>
+                  <a:tcPr marL="91440" marR="91440" marT="45720" marB="45720" anchor="ctr">
+                    <a:lnL w="9525" cap="flat" cmpd="sng" algn="ctr">
+                      <a:solidFill>
+                        <a:srgbClr val="D8DBE0"/>
+                      </a:solidFill>
+                      <a:prstDash val="solid"/>
+                      <a:round/>
+                      <a:headEnd type="none" w="med" len="med"/>
+                      <a:tailEnd type="none" w="med" len="med"/>
+                    </a:lnL>
+                    <a:lnR w="9525" cap="flat" cmpd="sng" algn="ctr">
+                      <a:solidFill>
+                        <a:srgbClr val="D8DBE0"/>
+                      </a:solidFill>
+                      <a:prstDash val="solid"/>
+                      <a:round/>
+                      <a:headEnd type="none" w="med" len="med"/>
+                      <a:tailEnd type="none" w="med" len="med"/>
+                    </a:lnR>
+                    <a:lnT w="9525" cap="flat" cmpd="sng" algn="ctr">
+                      <a:solidFill>
+                        <a:srgbClr val="D8DBE0"/>
+                      </a:solidFill>
+                      <a:prstDash val="solid"/>
+                      <a:round/>
+                      <a:headEnd type="none" w="med" len="med"/>
+                      <a:tailEnd type="none" w="med" len="med"/>
+                    </a:lnT>
+                    <a:lnB w="9525" cap="flat" cmpd="sng" algn="ctr">
+                      <a:solidFill>
+                        <a:srgbClr val="D8DBE0"/>
+                      </a:solidFill>
+                      <a:prstDash val="solid"/>
+                      <a:round/>
+                      <a:headEnd type="none" w="med" len="med"/>
+                      <a:tailEnd type="none" w="med" len="med"/>
+                    </a:lnB>
+                    <a:solidFill>
+                      <a:srgbClr val="FFFFFF"/>
+                    </a:solidFill>
+                  </a:tcPr>
+                </a:tc>
+              </a:tr>
+              <a:tr h="420624">
+                <a:tc>
+                  <a:txBody>
+                    <a:bodyPr/>
+                    <a:lstStyle/>
+                    <a:p>
+                      <a:pPr algn="ctr" indent="0" marL="0">
+                        <a:buNone/>
+                      </a:pPr>
+                      <a:r>
+                        <a:rPr lang="en-US" sz="1500" dirty="0">
+                          <a:solidFill>
+                            <a:srgbClr val="1F2329"/>
+                          </a:solidFill>
+                          <a:latin typeface="微软雅黑" pitchFamily="34" charset="0"/>
+                          <a:ea typeface="微软雅黑" pitchFamily="34" charset="-122"/>
+                          <a:cs typeface="微软雅黑" pitchFamily="34" charset="-120"/>
+                        </a:rPr>
+                        <a:t>第5节</a:t>
+                      </a:r>
+                      <a:endParaRPr lang="en-US" sz="1500" dirty="0">
+                        <a:latin typeface="微软雅黑" charset="0"/>
+                        <a:ea typeface="微软雅黑" charset="0"/>
+                        <a:cs typeface="微软雅黑" charset="0"/>
+                      </a:endParaRPr>
+                    </a:p>
+                  </a:txBody>
+                  <a:tcPr marL="91440" marR="91440" marT="45720" marB="45720" anchor="ctr">
+                    <a:lnL w="9525" cap="flat" cmpd="sng" algn="ctr">
+                      <a:solidFill>
+                        <a:srgbClr val="D8DBE0"/>
+                      </a:solidFill>
+                      <a:prstDash val="solid"/>
+                      <a:round/>
+                      <a:headEnd type="none" w="med" len="med"/>
+                      <a:tailEnd type="none" w="med" len="med"/>
+                    </a:lnL>
+                    <a:lnR w="9525" cap="flat" cmpd="sng" algn="ctr">
+                      <a:solidFill>
+                        <a:srgbClr val="D8DBE0"/>
+                      </a:solidFill>
+                      <a:prstDash val="solid"/>
+                      <a:round/>
+                      <a:headEnd type="none" w="med" len="med"/>
+                      <a:tailEnd type="none" w="med" len="med"/>
+                    </a:lnR>
+                    <a:lnT w="9525" cap="flat" cmpd="sng" algn="ctr">
+                      <a:solidFill>
+                        <a:srgbClr val="D8DBE0"/>
+                      </a:solidFill>
+                      <a:prstDash val="solid"/>
+                      <a:round/>
+                      <a:headEnd type="none" w="med" len="med"/>
+                      <a:tailEnd type="none" w="med" len="med"/>
+                    </a:lnT>
+                    <a:lnB w="9525" cap="flat" cmpd="sng" algn="ctr">
+                      <a:solidFill>
+                        <a:srgbClr val="D8DBE0"/>
+                      </a:solidFill>
+                      <a:prstDash val="solid"/>
+                      <a:round/>
+                      <a:headEnd type="none" w="med" len="med"/>
+                      <a:tailEnd type="none" w="med" len="med"/>
+                    </a:lnB>
+                    <a:solidFill>
+                      <a:srgbClr val="FFFFFF"/>
+                    </a:solidFill>
+                  </a:tcPr>
+                </a:tc>
+                <a:tc>
+                  <a:txBody>
+                    <a:bodyPr/>
+                    <a:lstStyle/>
+                    <a:p>
+                      <a:pPr algn="ctr" indent="0" marL="0">
+                        <a:buNone/>
+                      </a:pPr>
+                      <a:r>
+                        <a:rPr lang="en-US" sz="1500" dirty="0">
+                          <a:solidFill>
+                            <a:srgbClr val="1F2329"/>
+                          </a:solidFill>
+                          <a:latin typeface="微软雅黑" pitchFamily="34" charset="0"/>
+                          <a:ea typeface="微软雅黑" pitchFamily="34" charset="-122"/>
+                          <a:cs typeface="微软雅黑" pitchFamily="34" charset="-120"/>
+                        </a:rPr>
+                        <a:t>引用与参数传递</a:t>
+                      </a:r>
+                      <a:endParaRPr lang="en-US" sz="1500" dirty="0">
+                        <a:latin typeface="微软雅黑" charset="0"/>
+                        <a:ea typeface="微软雅黑" charset="0"/>
+                        <a:cs typeface="微软雅黑" charset="0"/>
+                      </a:endParaRPr>
+                    </a:p>
+                  </a:txBody>
+                  <a:tcPr marL="91440" marR="91440" marT="45720" marB="45720" anchor="ctr">
+                    <a:lnL w="9525" cap="flat" cmpd="sng" algn="ctr">
+                      <a:solidFill>
+                        <a:srgbClr val="D8DBE0"/>
+                      </a:solidFill>
+                      <a:prstDash val="solid"/>
+                      <a:round/>
+                      <a:headEnd type="none" w="med" len="med"/>
+                      <a:tailEnd type="none" w="med" len="med"/>
+                    </a:lnL>
+                    <a:lnR w="9525" cap="flat" cmpd="sng" algn="ctr">
+                      <a:solidFill>
+                        <a:srgbClr val="D8DBE0"/>
+                      </a:solidFill>
+                      <a:prstDash val="solid"/>
+                      <a:round/>
+                      <a:headEnd type="none" w="med" len="med"/>
+                      <a:tailEnd type="none" w="med" len="med"/>
+                    </a:lnR>
+                    <a:lnT w="9525" cap="flat" cmpd="sng" algn="ctr">
+                      <a:solidFill>
+                        <a:srgbClr val="D8DBE0"/>
+                      </a:solidFill>
+                      <a:prstDash val="solid"/>
+                      <a:round/>
+                      <a:headEnd type="none" w="med" len="med"/>
+                      <a:tailEnd type="none" w="med" len="med"/>
+                    </a:lnT>
+                    <a:lnB w="9525" cap="flat" cmpd="sng" algn="ctr">
+                      <a:solidFill>
+                        <a:srgbClr val="D8DBE0"/>
+                      </a:solidFill>
+                      <a:prstDash val="solid"/>
+                      <a:round/>
+                      <a:headEnd type="none" w="med" len="med"/>
+                      <a:tailEnd type="none" w="med" len="med"/>
+                    </a:lnB>
+                    <a:solidFill>
+                      <a:srgbClr val="FFFFFF"/>
+                    </a:solidFill>
+                  </a:tcPr>
+                </a:tc>
+                <a:tc>
+                  <a:txBody>
+                    <a:bodyPr/>
+                    <a:lstStyle/>
+                    <a:p>
+                      <a:pPr algn="ctr" indent="0" marL="0">
+                        <a:buNone/>
+                      </a:pPr>
+                      <a:r>
+                        <a:rPr lang="en-US" sz="1500" dirty="0">
+                          <a:solidFill>
+                            <a:srgbClr val="1F2329"/>
+                          </a:solidFill>
+                          <a:latin typeface="微软雅黑" pitchFamily="34" charset="0"/>
+                          <a:ea typeface="微软雅黑" pitchFamily="34" charset="-122"/>
+                          <a:cs typeface="微软雅黑" pitchFamily="34" charset="-120"/>
+                        </a:rPr>
+                        <a:t>看懂伪代码里函数参数上的&amp;</a:t>
+                      </a:r>
+                      <a:endParaRPr lang="en-US" sz="1500" dirty="0">
+                        <a:latin typeface="微软雅黑" charset="0"/>
+                        <a:ea typeface="微软雅黑" charset="0"/>
+                        <a:cs typeface="微软雅黑" charset="0"/>
+                      </a:endParaRPr>
+                    </a:p>
+                  </a:txBody>
+                  <a:tcPr marL="91440" marR="91440" marT="45720" marB="45720" anchor="ctr">
+                    <a:lnL w="9525" cap="flat" cmpd="sng" algn="ctr">
+                      <a:solidFill>
+                        <a:srgbClr val="D8DBE0"/>
+                      </a:solidFill>
+                      <a:prstDash val="solid"/>
+                      <a:round/>
+                      <a:headEnd type="none" w="med" len="med"/>
+                      <a:tailEnd type="none" w="med" len="med"/>
+                    </a:lnL>
+                    <a:lnR w="9525" cap="flat" cmpd="sng" algn="ctr">
+                      <a:solidFill>
+                        <a:srgbClr val="D8DBE0"/>
+                      </a:solidFill>
+                      <a:prstDash val="solid"/>
+                      <a:round/>
+                      <a:headEnd type="none" w="med" len="med"/>
+                      <a:tailEnd type="none" w="med" len="med"/>
+                    </a:lnR>
+                    <a:lnT w="9525" cap="flat" cmpd="sng" algn="ctr">
+                      <a:solidFill>
+                        <a:srgbClr val="D8DBE0"/>
+                      </a:solidFill>
+                      <a:prstDash val="solid"/>
+                      <a:round/>
+                      <a:headEnd type="none" w="med" len="med"/>
+                      <a:tailEnd type="none" w="med" len="med"/>
+                    </a:lnT>
+                    <a:lnB w="9525" cap="flat" cmpd="sng" algn="ctr">
+                      <a:solidFill>
+                        <a:srgbClr val="D8DBE0"/>
+                      </a:solidFill>
+                      <a:prstDash val="solid"/>
+                      <a:round/>
+                      <a:headEnd type="none" w="med" len="med"/>
+                      <a:tailEnd type="none" w="med" len="med"/>
+                    </a:lnB>
+                    <a:solidFill>
+                      <a:srgbClr val="FFFFFF"/>
+                    </a:solidFill>
+                  </a:tcPr>
+                </a:tc>
+              </a:tr>
+              <a:tr h="420624">
+                <a:tc>
+                  <a:txBody>
+                    <a:bodyPr/>
+                    <a:lstStyle/>
+                    <a:p>
+                      <a:pPr algn="ctr" indent="0" marL="0">
+                        <a:buNone/>
+                      </a:pPr>
+                      <a:r>
+                        <a:rPr lang="en-US" sz="1500" dirty="0">
+                          <a:solidFill>
+                            <a:srgbClr val="1F2329"/>
+                          </a:solidFill>
+                          <a:latin typeface="微软雅黑" pitchFamily="34" charset="0"/>
+                          <a:ea typeface="微软雅黑" pitchFamily="34" charset="-122"/>
+                          <a:cs typeface="微软雅黑" pitchFamily="34" charset="-120"/>
+                        </a:rPr>
+                        <a:t>第6节</a:t>
                       </a:r>
                       <a:endParaRPr lang="en-US" sz="1500" dirty="0">
                         <a:latin typeface="微软雅黑" charset="0"/>
@@ -7920,7 +8172,7 @@
                   <a:srgbClr val="000000"/>
                 </a:solidFill>
               </a:rPr>
-              <a:t>跟练题必须自己敲一遍再看答案；本阶段的题开始要求写在纸上</a:t>
+              <a:t>跟练题必须自己先做再看答案；本阶段的题开始要求写在纸上</a:t>
             </a:r>
             <a:endParaRPr lang="en-US" sz="1800" dirty="0"/>
           </a:p>
@@ -8076,7 +8328,7 @@
                 <a:ea typeface="微软雅黑" pitchFamily="34" charset="-122"/>
                 <a:cs typeface="微软雅黑" pitchFamily="34" charset="-120"/>
               </a:rPr>
-              <a:t>基础阶段留下的为什么，答案都指向地址</a:t>
+              <a:t>基础阶段留下的第一个为什么</a:t>
             </a:r>
             <a:endParaRPr lang="en-US" sz="2800" dirty="0"/>
           </a:p>
@@ -8084,13 +8336,81 @@
       </p:sp>
       <p:sp>
         <p:nvSpPr>
-          <p:cNvPr id="5" name="Text 3"/>
-          <p:cNvSpPr/>
-          <p:nvPr/>
-        </p:nvSpPr>
-        <p:spPr>
-          <a:xfrm>
-            <a:off x="896112" y="2395728"/>
+          <p:cNvPr id="5" name="Shape 3"/>
+          <p:cNvSpPr/>
+          <p:nvPr/>
+        </p:nvSpPr>
+        <p:spPr>
+          <a:xfrm>
+            <a:off x="822960" y="2395728"/>
+            <a:ext cx="10545775" cy="795528"/>
+          </a:xfrm>
+          <a:prstGeom prst="rect">
+            <a:avLst/>
+          </a:prstGeom>
+          <a:solidFill>
+            <a:srgbClr val="F5F6F7"/>
+          </a:solidFill>
+          <a:ln w="9525">
+            <a:solidFill>
+              <a:srgbClr val="D8DBE0"/>
+            </a:solidFill>
+            <a:prstDash val="solid"/>
+          </a:ln>
+        </p:spPr>
+      </p:sp>
+      <p:sp>
+        <p:nvSpPr>
+          <p:cNvPr id="6" name="Text 4"/>
+          <p:cNvSpPr/>
+          <p:nvPr/>
+        </p:nvSpPr>
+        <p:spPr>
+          <a:xfrm>
+            <a:off x="1078992" y="2505456"/>
+            <a:ext cx="10033711" cy="576072"/>
+          </a:xfrm>
+          <a:prstGeom prst="rect">
+            <a:avLst/>
+          </a:prstGeom>
+          <a:noFill/>
+          <a:ln/>
+        </p:spPr>
+        <p:txBody>
+          <a:bodyPr wrap="square" rtlCol="0" anchor="t"/>
+          <a:lstStyle/>
+          <a:p>
+            <a:pPr algn="l" indent="0" marL="0">
+              <a:lnSpc>
+                <a:spcPct val="125000"/>
+              </a:lnSpc>
+              <a:buNone/>
+            </a:pPr>
+            <a:r>
+              <a:rPr lang="en-US" sz="1400" dirty="0">
+                <a:solidFill>
+                  <a:srgbClr val="1F2329"/>
+                </a:solidFill>
+                <a:latin typeface="Consolas" pitchFamily="34" charset="0"/>
+                <a:ea typeface="Consolas" pitchFamily="34" charset="-122"/>
+                <a:cs typeface="Consolas" pitchFamily="34" charset="-120"/>
+              </a:rPr>
+              <a:t>scanf("%d", &amp;score);   // 这个&amp;，为什么非写不可？
+</a:t>
+            </a:r>
+            <a:endParaRPr lang="en-US" sz="1400" dirty="0"/>
+          </a:p>
+        </p:txBody>
+      </p:sp>
+      <p:sp>
+        <p:nvSpPr>
+          <p:cNvPr id="7" name="Text 5"/>
+          <p:cNvSpPr/>
+          <p:nvPr/>
+        </p:nvSpPr>
+        <p:spPr>
+          <a:xfrm>
+            <a:off x="896112" y="3392424"/>
             <a:ext cx="10454335" cy="397764"/>
           </a:xfrm>
           <a:prstGeom prst="rect">
@@ -8132,7 +8452,7 @@
                   <a:srgbClr val="000000"/>
                 </a:solidFill>
               </a:rPr>
-              <a:t>三个为什么：scanf为什么要写&amp;；数组下标为什么从0开始；越界为什么危险</a:t>
+              <a:t>基础阶段你照抄了这个写法，当时说好这个阶段讲原因，现在兑现</a:t>
             </a:r>
             <a:endParaRPr lang="en-US" sz="1800" dirty="0"/>
           </a:p>
@@ -8140,13 +8460,13 @@
       </p:sp>
       <p:sp>
         <p:nvSpPr>
-          <p:cNvPr id="6" name="Text 4"/>
-          <p:cNvSpPr/>
-          <p:nvPr/>
-        </p:nvSpPr>
-        <p:spPr>
-          <a:xfrm>
-            <a:off x="896112" y="2866644"/>
+          <p:cNvPr id="8" name="Text 6"/>
+          <p:cNvSpPr/>
+          <p:nvPr/>
+        </p:nvSpPr>
+        <p:spPr>
+          <a:xfrm>
+            <a:off x="896112" y="3863340"/>
             <a:ext cx="10454335" cy="397764"/>
           </a:xfrm>
           <a:prstGeom prst="rect">
@@ -8188,7 +8508,7 @@
                   <a:srgbClr val="000000"/>
                 </a:solidFill>
               </a:rPr>
-              <a:t>这三个问题的答案，指向同一个东西：</a:t>
+              <a:t>答案指向一个词：</a:t>
             </a:r>
             <a:pPr algn="l" indent="0" marL="0">
               <a:lnSpc>
@@ -8202,33 +8522,8 @@
                   <a:srgbClr val="000000"/>
                 </a:solidFill>
               </a:rPr>
-              <a:t>内存的地址</a:t>
-            </a:r>
-            <a:endParaRPr lang="en-US" sz="1800" dirty="0"/>
-          </a:p>
-        </p:txBody>
-      </p:sp>
-      <p:sp>
-        <p:nvSpPr>
-          <p:cNvPr id="7" name="Text 5"/>
-          <p:cNvSpPr/>
-          <p:nvPr/>
-        </p:nvSpPr>
-        <p:spPr>
-          <a:xfrm>
-            <a:off x="896112" y="3337560"/>
-            <a:ext cx="10454335" cy="397764"/>
-          </a:xfrm>
-          <a:prstGeom prst="rect">
-            <a:avLst/>
-          </a:prstGeom>
-          <a:noFill/>
-          <a:ln/>
-        </p:spPr>
-        <p:txBody>
-          <a:bodyPr wrap="square" rtlCol="0" anchor="t"/>
-          <a:lstStyle/>
-          <a:p>
+              <a:t>地址</a:t>
+            </a:r>
             <a:pPr algn="l" indent="0" marL="0">
               <a:lnSpc>
                 <a:spcPct val="115000"/>
@@ -8236,6 +8531,45 @@
               <a:buNone/>
             </a:pPr>
             <a:r>
+              <a:rPr lang="en-US" sz="1800" dirty="0">
+                <a:solidFill>
+                  <a:srgbClr val="000000"/>
+                </a:solidFill>
+              </a:rPr>
+              <a:t>——scanf得知道数据该放进哪一格内存</a:t>
+            </a:r>
+            <a:endParaRPr lang="en-US" sz="1800" dirty="0"/>
+          </a:p>
+        </p:txBody>
+      </p:sp>
+      <p:sp>
+        <p:nvSpPr>
+          <p:cNvPr id="9" name="Text 7"/>
+          <p:cNvSpPr/>
+          <p:nvPr/>
+        </p:nvSpPr>
+        <p:spPr>
+          <a:xfrm>
+            <a:off x="896112" y="4334256"/>
+            <a:ext cx="10454335" cy="397764"/>
+          </a:xfrm>
+          <a:prstGeom prst="rect">
+            <a:avLst/>
+          </a:prstGeom>
+          <a:noFill/>
+          <a:ln/>
+        </p:spPr>
+        <p:txBody>
+          <a:bodyPr wrap="square" rtlCol="0" anchor="t"/>
+          <a:lstStyle/>
+          <a:p>
+            <a:pPr algn="l" indent="0" marL="0">
+              <a:lnSpc>
+                <a:spcPct val="115000"/>
+              </a:lnSpc>
+              <a:buNone/>
+            </a:pPr>
+            <a:r>
               <a:rPr lang="en-US" sz="1800" b="1" dirty="0">
                 <a:solidFill>
                   <a:srgbClr val="1F4E9C"/>
@@ -8258,7 +8592,7 @@
                   <a:srgbClr val="000000"/>
                 </a:solidFill>
               </a:rPr>
-              <a:t>本节目标：学完你能看懂指针、用&amp;和*操作地址，明白数组在内存里的样子</a:t>
+              <a:t>本节目标：搞懂地址与指针，会画内存图；这个工具拿到手，基础阶段的问题就能一个个解开</a:t>
             </a:r>
             <a:endParaRPr lang="en-US" sz="1800" dirty="0"/>
           </a:p>
@@ -8414,7 +8748,7 @@
                 <a:ea typeface="微软雅黑" pitchFamily="34" charset="-122"/>
                 <a:cs typeface="微软雅黑" pitchFamily="34" charset="-120"/>
               </a:rPr>
-              <a:t>地址：内存格子的编号，&amp;把编号拿出来</a:t>
+              <a:t>地址：内存格子的编号，%p把它打印出来</a:t>
             </a:r>
             <a:endParaRPr lang="en-US" sz="2800" dirty="0"/>
           </a:p>
@@ -8482,7 +8816,7 @@
                 <a:cs typeface="Consolas" pitchFamily="34" charset="-120"/>
               </a:rPr>
               <a:t>int x = 10;
-printf("%p", &amp;x);     // 打印x的地址，%p专门打地址
+printf("%p", &amp;x);     // %p专门打印地址
 </a:t>
             </a:r>
             <a:endParaRPr lang="en-US" sz="1400" dirty="0"/>
@@ -8624,7 +8958,7 @@
         <p:spPr>
           <a:xfrm>
             <a:off x="896112" y="4572000"/>
-            <a:ext cx="10454335" cy="740664"/>
+            <a:ext cx="10454335" cy="397764"/>
           </a:xfrm>
           <a:prstGeom prst="rect">
             <a:avLst/>
@@ -8665,7 +8999,7 @@
                   <a:srgbClr val="000000"/>
                 </a:solidFill>
               </a:rPr>
-              <a:t>scanf("%d", &amp;score)：把输入的数字放进score所在的格子，不给地址它找不到地方放</a:t>
+              <a:t>int占4格、char占1格、double占8格，门牌号用第一格的编号</a:t>
             </a:r>
             <a:endParaRPr lang="en-US" sz="1800" dirty="0"/>
           </a:p>
@@ -8782,7 +9116,7 @@
                 <a:ea typeface="微软雅黑" pitchFamily="34" charset="-122"/>
                 <a:cs typeface="微软雅黑" pitchFamily="34" charset="-120"/>
               </a:rPr>
-              <a:t>指针登场</a:t>
+              <a:t>钩子兑现</a:t>
             </a:r>
             <a:endParaRPr lang="en-US" sz="1400" dirty="0"/>
           </a:p>
@@ -8821,7 +9155,7 @@
                 <a:ea typeface="微软雅黑" pitchFamily="34" charset="-122"/>
                 <a:cs typeface="微软雅黑" pitchFamily="34" charset="-120"/>
               </a:rPr>
-              <a:t>指针：专门存地址的变量</a:t>
+              <a:t>scanf的&amp;：把门牌号交出去，数据才放得进去</a:t>
             </a:r>
             <a:endParaRPr lang="en-US" sz="2800" dirty="0"/>
           </a:p>
@@ -8888,8 +9222,8 @@
                 <a:ea typeface="Consolas" pitchFamily="34" charset="-122"/>
                 <a:cs typeface="Consolas" pitchFamily="34" charset="-120"/>
               </a:rPr>
-              <a:t>int x = 10;
-int *p = &amp;x;          // p里存的是x的地址，读作：p指向x
+              <a:t>scanf("%d", &amp;score);  // 把score的地址交给scanf
+printf("%d", score);  // 读出来就行，printf不用&amp;
 </a:t>
             </a:r>
             <a:endParaRPr lang="en-US" sz="1400" dirty="0"/>
@@ -8946,8 +9280,33 @@
                   <a:srgbClr val="000000"/>
                 </a:solidFill>
               </a:rPr>
-              <a:t>int *p：声明一个指针，它</a:t>
-            </a:r>
+              <a:t>scanf的工作是把数据放进格子，没有门牌号，它拿着数据找不到地方</a:t>
+            </a:r>
+            <a:endParaRPr lang="en-US" sz="1800" dirty="0"/>
+          </a:p>
+        </p:txBody>
+      </p:sp>
+      <p:sp>
+        <p:nvSpPr>
+          <p:cNvPr id="8" name="Text 6"/>
+          <p:cNvSpPr/>
+          <p:nvPr/>
+        </p:nvSpPr>
+        <p:spPr>
+          <a:xfrm>
+            <a:off x="896112" y="4101084"/>
+            <a:ext cx="10454335" cy="397764"/>
+          </a:xfrm>
+          <a:prstGeom prst="rect">
+            <a:avLst/>
+          </a:prstGeom>
+          <a:noFill/>
+          <a:ln/>
+        </p:spPr>
+        <p:txBody>
+          <a:bodyPr wrap="square" rtlCol="0" anchor="t"/>
+          <a:lstStyle/>
+          <a:p>
             <a:pPr algn="l" indent="0" marL="0">
               <a:lnSpc>
                 <a:spcPct val="115000"/>
@@ -8957,10 +9316,13 @@
             <a:r>
               <a:rPr lang="en-US" sz="1800" b="1" dirty="0">
                 <a:solidFill>
-                  <a:srgbClr val="000000"/>
-                </a:solidFill>
-              </a:rPr>
-              <a:t>只存地址</a:t>
+                  <a:srgbClr val="1F4E9C"/>
+                </a:solidFill>
+                <a:latin typeface="微软雅黑" pitchFamily="34" charset="0"/>
+                <a:ea typeface="微软雅黑" pitchFamily="34" charset="-122"/>
+                <a:cs typeface="微软雅黑" pitchFamily="34" charset="-120"/>
+              </a:rPr>
+              <a:t>•  </a:t>
             </a:r>
             <a:pPr algn="l" indent="0" marL="0">
               <a:lnSpc>
@@ -8974,7 +9336,7 @@
                   <a:srgbClr val="000000"/>
                 </a:solidFill>
               </a:rPr>
-              <a:t>，存的是int变量的地址</a:t>
+              <a:t>printf只是把格子里的东西读出来看一眼，所以不用写&amp;</a:t>
             </a:r>
             <a:endParaRPr lang="en-US" sz="1800" dirty="0"/>
           </a:p>
@@ -8982,13 +9344,13 @@
       </p:sp>
       <p:sp>
         <p:nvSpPr>
-          <p:cNvPr id="8" name="Text 6"/>
-          <p:cNvSpPr/>
-          <p:nvPr/>
-        </p:nvSpPr>
-        <p:spPr>
-          <a:xfrm>
-            <a:off x="896112" y="4101084"/>
+          <p:cNvPr id="9" name="Text 7"/>
+          <p:cNvSpPr/>
+          <p:nvPr/>
+        </p:nvSpPr>
+        <p:spPr>
+          <a:xfrm>
+            <a:off x="896112" y="4572000"/>
             <a:ext cx="10454335" cy="397764"/>
           </a:xfrm>
           <a:prstGeom prst="rect">
@@ -9030,7 +9392,7 @@
                   <a:srgbClr val="000000"/>
                 </a:solidFill>
               </a:rPr>
-              <a:t>p = &amp;x：把x的地址放进p，习惯说成</a:t>
+              <a:t>谁要</a:t>
             </a:r>
             <a:pPr algn="l" indent="0" marL="0">
               <a:lnSpc>
@@ -9044,33 +9406,8 @@
                   <a:srgbClr val="000000"/>
                 </a:solidFill>
               </a:rPr>
-              <a:t>p指向x</a:t>
-            </a:r>
-            <a:endParaRPr lang="en-US" sz="1800" dirty="0"/>
-          </a:p>
-        </p:txBody>
-      </p:sp>
-      <p:sp>
-        <p:nvSpPr>
-          <p:cNvPr id="9" name="Text 7"/>
-          <p:cNvSpPr/>
-          <p:nvPr/>
-        </p:nvSpPr>
-        <p:spPr>
-          <a:xfrm>
-            <a:off x="896112" y="4572000"/>
-            <a:ext cx="10454335" cy="397764"/>
-          </a:xfrm>
-          <a:prstGeom prst="rect">
-            <a:avLst/>
-          </a:prstGeom>
-          <a:noFill/>
-          <a:ln/>
-        </p:spPr>
-        <p:txBody>
-          <a:bodyPr wrap="square" rtlCol="0" anchor="t"/>
-          <a:lstStyle/>
-          <a:p>
+              <a:t>走进你的格子</a:t>
+            </a:r>
             <a:pPr algn="l" indent="0" marL="0">
               <a:lnSpc>
                 <a:spcPct val="115000"/>
@@ -9078,29 +9415,12 @@
               <a:buNone/>
             </a:pPr>
             <a:r>
-              <a:rPr lang="en-US" sz="1800" b="1" dirty="0">
-                <a:solidFill>
-                  <a:srgbClr val="1F4E9C"/>
-                </a:solidFill>
-                <a:latin typeface="微软雅黑" pitchFamily="34" charset="0"/>
-                <a:ea typeface="微软雅黑" pitchFamily="34" charset="-122"/>
-                <a:cs typeface="微软雅黑" pitchFamily="34" charset="-120"/>
-              </a:rPr>
-              <a:t>•  </a:t>
-            </a:r>
-            <a:pPr algn="l" indent="0" marL="0">
-              <a:lnSpc>
-                <a:spcPct val="115000"/>
-              </a:lnSpc>
-              <a:buNone/>
-            </a:pPr>
-            <a:r>
               <a:rPr lang="en-US" sz="1800" dirty="0">
                 <a:solidFill>
                   <a:srgbClr val="000000"/>
                 </a:solidFill>
               </a:rPr>
-              <a:t>画内存图的习惯从本节开始：格子写名字、编号、值，指针画箭头</a:t>
+              <a:t>，谁就需要门牌号；只远观的不用</a:t>
             </a:r>
             <a:endParaRPr lang="en-US" sz="1800" dirty="0"/>
           </a:p>
@@ -9217,7 +9537,7 @@
                 <a:ea typeface="微软雅黑" pitchFamily="34" charset="-122"/>
                 <a:cs typeface="微软雅黑" pitchFamily="34" charset="-120"/>
               </a:rPr>
-              <a:t>取值的另一条路</a:t>
+              <a:t>指针登场</a:t>
             </a:r>
             <a:endParaRPr lang="en-US" sz="1400" dirty="0"/>
           </a:p>
@@ -9256,7 +9576,7 @@
                 <a:ea typeface="微软雅黑" pitchFamily="34" charset="-122"/>
                 <a:cs typeface="微软雅黑" pitchFamily="34" charset="-120"/>
               </a:rPr>
-              <a:t>*p：顺着地址找到格子里的东西</a:t>
+              <a:t>指针：专门存地址的变量</a:t>
             </a:r>
             <a:endParaRPr lang="en-US" sz="2800" dirty="0"/>
           </a:p>
@@ -9323,8 +9643,8 @@
                 <a:ea typeface="Consolas" pitchFamily="34" charset="-122"/>
                 <a:cs typeface="Consolas" pitchFamily="34" charset="-120"/>
               </a:rPr>
-              <a:t>printf("%d", *p);     // 顺着p存的地址，取出格子里的值：10
-*p = 20;              // x也变成20：改的是同一格内存
+              <a:t>int x = 10;
+int *p = &amp;x;          // p里存的是x的地址，读作：p指向x
 </a:t>
             </a:r>
             <a:endParaRPr lang="en-US" sz="1400" dirty="0"/>
@@ -9381,33 +9701,8 @@
                   <a:srgbClr val="000000"/>
                 </a:solidFill>
               </a:rPr>
-              <a:t>*读作取值：顺着地址找到那个格子，拿里面的东西</a:t>
-            </a:r>
-            <a:endParaRPr lang="en-US" sz="1800" dirty="0"/>
-          </a:p>
-        </p:txBody>
-      </p:sp>
-      <p:sp>
-        <p:nvSpPr>
-          <p:cNvPr id="8" name="Text 6"/>
-          <p:cNvSpPr/>
-          <p:nvPr/>
-        </p:nvSpPr>
-        <p:spPr>
-          <a:xfrm>
-            <a:off x="896112" y="4101084"/>
-            <a:ext cx="10454335" cy="740664"/>
-          </a:xfrm>
-          <a:prstGeom prst="rect">
-            <a:avLst/>
-          </a:prstGeom>
-          <a:noFill/>
-          <a:ln/>
-        </p:spPr>
-        <p:txBody>
-          <a:bodyPr wrap="square" rtlCol="0" anchor="t"/>
-          <a:lstStyle/>
-          <a:p>
+              <a:t>int *p：声明一个指针，它</a:t>
+            </a:r>
             <a:pPr algn="l" indent="0" marL="0">
               <a:lnSpc>
                 <a:spcPct val="115000"/>
@@ -9417,6 +9712,59 @@
             <a:r>
               <a:rPr lang="en-US" sz="1800" b="1" dirty="0">
                 <a:solidFill>
+                  <a:srgbClr val="000000"/>
+                </a:solidFill>
+              </a:rPr>
+              <a:t>只存地址</a:t>
+            </a:r>
+            <a:pPr algn="l" indent="0" marL="0">
+              <a:lnSpc>
+                <a:spcPct val="115000"/>
+              </a:lnSpc>
+              <a:buNone/>
+            </a:pPr>
+            <a:r>
+              <a:rPr lang="en-US" sz="1800" dirty="0">
+                <a:solidFill>
+                  <a:srgbClr val="000000"/>
+                </a:solidFill>
+              </a:rPr>
+              <a:t>，存的是int变量的地址</a:t>
+            </a:r>
+            <a:endParaRPr lang="en-US" sz="1800" dirty="0"/>
+          </a:p>
+        </p:txBody>
+      </p:sp>
+      <p:sp>
+        <p:nvSpPr>
+          <p:cNvPr id="8" name="Text 6"/>
+          <p:cNvSpPr/>
+          <p:nvPr/>
+        </p:nvSpPr>
+        <p:spPr>
+          <a:xfrm>
+            <a:off x="896112" y="4101084"/>
+            <a:ext cx="10454335" cy="397764"/>
+          </a:xfrm>
+          <a:prstGeom prst="rect">
+            <a:avLst/>
+          </a:prstGeom>
+          <a:noFill/>
+          <a:ln/>
+        </p:spPr>
+        <p:txBody>
+          <a:bodyPr wrap="square" rtlCol="0" anchor="t"/>
+          <a:lstStyle/>
+          <a:p>
+            <a:pPr algn="l" indent="0" marL="0">
+              <a:lnSpc>
+                <a:spcPct val="115000"/>
+              </a:lnSpc>
+              <a:buNone/>
+            </a:pPr>
+            <a:r>
+              <a:rPr lang="en-US" sz="1800" b="1" dirty="0">
+                <a:solidFill>
                   <a:srgbClr val="1F4E9C"/>
                 </a:solidFill>
                 <a:latin typeface="微软雅黑" pitchFamily="34" charset="0"/>
@@ -9437,8 +9785,33 @@
                   <a:srgbClr val="000000"/>
                 </a:solidFill>
               </a:rPr>
-              <a:t>p++：地址往后挪一格，指向</a:t>
-            </a:r>
+              <a:t>p里装的不是10，是x住哪；想看10，要用下一页的工具</a:t>
+            </a:r>
+            <a:endParaRPr lang="en-US" sz="1800" dirty="0"/>
+          </a:p>
+        </p:txBody>
+      </p:sp>
+      <p:sp>
+        <p:nvSpPr>
+          <p:cNvPr id="9" name="Text 7"/>
+          <p:cNvSpPr/>
+          <p:nvPr/>
+        </p:nvSpPr>
+        <p:spPr>
+          <a:xfrm>
+            <a:off x="896112" y="4572000"/>
+            <a:ext cx="10454335" cy="397764"/>
+          </a:xfrm>
+          <a:prstGeom prst="rect">
+            <a:avLst/>
+          </a:prstGeom>
+          <a:noFill/>
+          <a:ln/>
+        </p:spPr>
+        <p:txBody>
+          <a:bodyPr wrap="square" rtlCol="0" anchor="t"/>
+          <a:lstStyle/>
+          <a:p>
             <a:pPr algn="l" indent="0" marL="0">
               <a:lnSpc>
                 <a:spcPct val="115000"/>
@@ -9448,10 +9821,13 @@
             <a:r>
               <a:rPr lang="en-US" sz="1800" b="1" dirty="0">
                 <a:solidFill>
-                  <a:srgbClr val="000000"/>
-                </a:solidFill>
-              </a:rPr>
-              <a:t>下一个int格子</a:t>
+                  <a:srgbClr val="1F4E9C"/>
+                </a:solidFill>
+                <a:latin typeface="微软雅黑" pitchFamily="34" charset="0"/>
+                <a:ea typeface="微软雅黑" pitchFamily="34" charset="-122"/>
+                <a:cs typeface="微软雅黑" pitchFamily="34" charset="-120"/>
+              </a:rPr>
+              <a:t>•  </a:t>
             </a:r>
             <a:pPr algn="l" indent="0" marL="0">
               <a:lnSpc>
@@ -9465,63 +9841,7 @@
                   <a:srgbClr val="000000"/>
                 </a:solidFill>
               </a:rPr>
-              <a:t>（不是加1个字节，802伪代码按int读）</a:t>
-            </a:r>
-            <a:endParaRPr lang="en-US" sz="1800" dirty="0"/>
-          </a:p>
-        </p:txBody>
-      </p:sp>
-      <p:sp>
-        <p:nvSpPr>
-          <p:cNvPr id="9" name="Text 7"/>
-          <p:cNvSpPr/>
-          <p:nvPr/>
-        </p:nvSpPr>
-        <p:spPr>
-          <a:xfrm>
-            <a:off x="896112" y="4914900"/>
-            <a:ext cx="10454335" cy="740664"/>
-          </a:xfrm>
-          <a:prstGeom prst="rect">
-            <a:avLst/>
-          </a:prstGeom>
-          <a:noFill/>
-          <a:ln/>
-        </p:spPr>
-        <p:txBody>
-          <a:bodyPr wrap="square" rtlCol="0" anchor="t"/>
-          <a:lstStyle/>
-          <a:p>
-            <a:pPr algn="l" indent="0" marL="0">
-              <a:lnSpc>
-                <a:spcPct val="115000"/>
-              </a:lnSpc>
-              <a:buNone/>
-            </a:pPr>
-            <a:r>
-              <a:rPr lang="en-US" sz="1800" b="1" dirty="0">
-                <a:solidFill>
-                  <a:srgbClr val="1F4E9C"/>
-                </a:solidFill>
-                <a:latin typeface="微软雅黑" pitchFamily="34" charset="0"/>
-                <a:ea typeface="微软雅黑" pitchFamily="34" charset="-122"/>
-                <a:cs typeface="微软雅黑" pitchFamily="34" charset="-120"/>
-              </a:rPr>
-              <a:t>•  </a:t>
-            </a:r>
-            <a:pPr algn="l" indent="0" marL="0">
-              <a:lnSpc>
-                <a:spcPct val="115000"/>
-              </a:lnSpc>
-              <a:buNone/>
-            </a:pPr>
-            <a:r>
-              <a:rPr lang="en-US" sz="1800" dirty="0">
-                <a:solidFill>
-                  <a:srgbClr val="000000"/>
-                </a:solidFill>
-              </a:rPr>
-              <a:t>顺带说清：p++先用再加，++p先加再用；802代码里几乎只用p++和i++这种先用再加的写法</a:t>
+              <a:t>画内存图的习惯从本节开始：格子写名字、编号、值，指针画箭头</a:t>
             </a:r>
             <a:endParaRPr lang="en-US" sz="1800" dirty="0"/>
           </a:p>

--- a/课件/C1/C1-B-01/C1-B-01.pptx
+++ b/课件/C1/C1-B-01/C1-B-01.pptx
@@ -20,9 +20,11 @@
     <p:sldId id="268" r:id="rId14"/>
     <p:sldId id="269" r:id="rId15"/>
     <p:sldId id="270" r:id="rId16"/>
+    <p:sldId id="271" r:id="rId17"/>
+    <p:sldId id="272" r:id="rId18"/>
   </p:sldIdLst>
   <p:notesMasterIdLst>
-    <p:notesMasterId r:id="rId17"/>
+    <p:notesMasterId r:id="rId19"/>
   </p:notesMasterIdLst>
   <p:sldSz cx="12191695" cy="6858000"/>
   <p:notesSz cx="6858000" cy="12191695"/>
@@ -1068,6 +1070,182 @@
             <a:fld id="{F7021451-1387-4CA6-816F-3879F97B5CBC}" type="slidenum">
               <a:rPr lang="en-US"/>
               <a:t>15</a:t>
+            </a:fld>
+            <a:endParaRPr lang="en-US"/>
+          </a:p>
+        </p:txBody>
+      </p:sp>
+    </p:spTree>
+    <p:extLst>
+      <p:ext uri="{BB962C8B-B14F-4D97-AF65-F5344CB8AC3E}">
+        <p14:creationId xmlns:p14="http://schemas.microsoft.com/office/powerpoint/2010/main" val="1024086991"/>
+      </p:ext>
+    </p:extLst>
+  </p:cSld>
+  <p:clrMapOvr>
+    <a:masterClrMapping/>
+  </p:clrMapOvr>
+</p:notes>
+</file>
+
+<file path=ppt/notesSlides/notesSlide16.xml><?xml version="1.0" encoding="utf-8"?>
+<p:notes xmlns:a="http://schemas.openxmlformats.org/drawingml/2006/main" xmlns:r="http://schemas.openxmlformats.org/officeDocument/2006/relationships" xmlns:p="http://schemas.openxmlformats.org/presentationml/2006/main">
+  <p:cSld>
+    <p:spTree>
+      <p:nvGrpSpPr>
+        <p:cNvPr id="1" name=""/>
+        <p:cNvGrpSpPr/>
+        <p:nvPr/>
+      </p:nvGrpSpPr>
+      <p:grpSpPr>
+        <a:xfrm>
+          <a:off x="0" y="0"/>
+          <a:ext cx="0" cy="0"/>
+          <a:chOff x="0" y="0"/>
+          <a:chExt cx="0" cy="0"/>
+        </a:xfrm>
+      </p:grpSpPr>
+      <p:sp>
+        <p:nvSpPr>
+          <p:cNvPr id="2" name="Slide Image Placeholder 1"/>
+          <p:cNvSpPr>
+            <a:spLocks noGrp="1" noRot="1" noChangeAspect="1"/>
+          </p:cNvSpPr>
+          <p:nvPr>
+            <p:ph type="sldImg"/>
+          </p:nvPr>
+        </p:nvSpPr>
+        <p:spPr/>
+      </p:sp>
+      <p:sp>
+        <p:nvSpPr>
+          <p:cNvPr id="3" name="Notes Placeholder 2"/>
+          <p:cNvSpPr>
+            <a:spLocks noGrp="1"/>
+          </p:cNvSpPr>
+          <p:nvPr>
+            <p:ph type="body" idx="1"/>
+          </p:nvPr>
+        </p:nvSpPr>
+        <p:spPr/>
+        <p:txBody>
+          <a:bodyPr/>
+          <a:lstStyle/>
+          <a:p>
+            <a:r>
+              <a:rPr lang="en-US" dirty="0"/>
+              <a:t/>
+            </a:r>
+            <a:endParaRPr lang="en-US" dirty="0"/>
+          </a:p>
+        </p:txBody>
+      </p:sp>
+      <p:sp>
+        <p:nvSpPr>
+          <p:cNvPr id="4" name="Slide Number Placeholder 3"/>
+          <p:cNvSpPr>
+            <a:spLocks noGrp="1"/>
+          </p:cNvSpPr>
+          <p:nvPr>
+            <p:ph type="sldNum" sz="quarter" idx="10"/>
+          </p:nvPr>
+        </p:nvSpPr>
+        <p:spPr/>
+        <p:txBody>
+          <a:bodyPr/>
+          <a:lstStyle/>
+          <a:p>
+            <a:fld id="{F7021451-1387-4CA6-816F-3879F97B5CBC}" type="slidenum">
+              <a:rPr lang="en-US"/>
+              <a:t>16</a:t>
+            </a:fld>
+            <a:endParaRPr lang="en-US"/>
+          </a:p>
+        </p:txBody>
+      </p:sp>
+    </p:spTree>
+    <p:extLst>
+      <p:ext uri="{BB962C8B-B14F-4D97-AF65-F5344CB8AC3E}">
+        <p14:creationId xmlns:p14="http://schemas.microsoft.com/office/powerpoint/2010/main" val="1024086991"/>
+      </p:ext>
+    </p:extLst>
+  </p:cSld>
+  <p:clrMapOvr>
+    <a:masterClrMapping/>
+  </p:clrMapOvr>
+</p:notes>
+</file>
+
+<file path=ppt/notesSlides/notesSlide17.xml><?xml version="1.0" encoding="utf-8"?>
+<p:notes xmlns:a="http://schemas.openxmlformats.org/drawingml/2006/main" xmlns:r="http://schemas.openxmlformats.org/officeDocument/2006/relationships" xmlns:p="http://schemas.openxmlformats.org/presentationml/2006/main">
+  <p:cSld>
+    <p:spTree>
+      <p:nvGrpSpPr>
+        <p:cNvPr id="1" name=""/>
+        <p:cNvGrpSpPr/>
+        <p:nvPr/>
+      </p:nvGrpSpPr>
+      <p:grpSpPr>
+        <a:xfrm>
+          <a:off x="0" y="0"/>
+          <a:ext cx="0" cy="0"/>
+          <a:chOff x="0" y="0"/>
+          <a:chExt cx="0" cy="0"/>
+        </a:xfrm>
+      </p:grpSpPr>
+      <p:sp>
+        <p:nvSpPr>
+          <p:cNvPr id="2" name="Slide Image Placeholder 1"/>
+          <p:cNvSpPr>
+            <a:spLocks noGrp="1" noRot="1" noChangeAspect="1"/>
+          </p:cNvSpPr>
+          <p:nvPr>
+            <p:ph type="sldImg"/>
+          </p:nvPr>
+        </p:nvSpPr>
+        <p:spPr/>
+      </p:sp>
+      <p:sp>
+        <p:nvSpPr>
+          <p:cNvPr id="3" name="Notes Placeholder 2"/>
+          <p:cNvSpPr>
+            <a:spLocks noGrp="1"/>
+          </p:cNvSpPr>
+          <p:nvPr>
+            <p:ph type="body" idx="1"/>
+          </p:nvPr>
+        </p:nvSpPr>
+        <p:spPr/>
+        <p:txBody>
+          <a:bodyPr/>
+          <a:lstStyle/>
+          <a:p>
+            <a:r>
+              <a:rPr lang="en-US" dirty="0"/>
+              <a:t/>
+            </a:r>
+            <a:endParaRPr lang="en-US" dirty="0"/>
+          </a:p>
+        </p:txBody>
+      </p:sp>
+      <p:sp>
+        <p:nvSpPr>
+          <p:cNvPr id="4" name="Slide Number Placeholder 3"/>
+          <p:cNvSpPr>
+            <a:spLocks noGrp="1"/>
+          </p:cNvSpPr>
+          <p:nvPr>
+            <p:ph type="sldNum" sz="quarter" idx="10"/>
+          </p:nvPr>
+        </p:nvSpPr>
+        <p:spPr/>
+        <p:txBody>
+          <a:bodyPr/>
+          <a:lstStyle/>
+          <a:p>
+            <a:fld id="{F7021451-1387-4CA6-816F-3879F97B5CBC}" type="slidenum">
+              <a:rPr lang="en-US"/>
+              <a:t>17</a:t>
             </a:fld>
             <a:endParaRPr lang="en-US"/>
           </a:p>
@@ -2161,7 +2339,7 @@
                 <a:ea typeface="微软雅黑" pitchFamily="34" charset="-122"/>
                 <a:cs typeface="微软雅黑" pitchFamily="34" charset="-120"/>
               </a:rPr>
-              <a:t>1 / 15</a:t>
+              <a:t>1 / 17</a:t>
             </a:r>
             <a:endParaRPr lang="en-US" sz="1000" dirty="0"/>
           </a:p>
@@ -2395,7 +2573,7 @@
                 <a:ea typeface="微软雅黑" pitchFamily="34" charset="-122"/>
                 <a:cs typeface="微软雅黑" pitchFamily="34" charset="-120"/>
               </a:rPr>
-              <a:t>10 / 15</a:t>
+              <a:t>10 / 17</a:t>
             </a:r>
             <a:endParaRPr lang="en-US" sz="1000" dirty="0"/>
           </a:p>
@@ -2494,19 +2672,34 @@
             <a:avLst/>
           </a:prstGeom>
           <a:solidFill>
-            <a:srgbClr val="F5F6F7"/>
+            <a:srgbClr val="F7F9FC"/>
           </a:solidFill>
-          <a:ln w="9525">
-            <a:solidFill>
-              <a:srgbClr val="D8DBE0"/>
-            </a:solidFill>
-            <a:prstDash val="solid"/>
-          </a:ln>
-        </p:spPr>
-      </p:sp>
-      <p:sp>
-        <p:nvSpPr>
-          <p:cNvPr id="6" name="Text 4"/>
+          <a:ln/>
+        </p:spPr>
+      </p:sp>
+      <p:sp>
+        <p:nvSpPr>
+          <p:cNvPr id="6" name="Shape 4"/>
+          <p:cNvSpPr/>
+          <p:nvPr/>
+        </p:nvSpPr>
+        <p:spPr>
+          <a:xfrm>
+            <a:off x="822960" y="2395728"/>
+            <a:ext cx="50292" cy="1033272"/>
+          </a:xfrm>
+          <a:prstGeom prst="rect">
+            <a:avLst/>
+          </a:prstGeom>
+          <a:solidFill>
+            <a:srgbClr val="1F4E9C"/>
+          </a:solidFill>
+          <a:ln/>
+        </p:spPr>
+      </p:sp>
+      <p:sp>
+        <p:nvSpPr>
+          <p:cNvPr id="7" name="Text 5"/>
           <p:cNvSpPr/>
           <p:nvPr/>
         </p:nvSpPr>
@@ -2550,7 +2743,7 @@
       </p:sp>
       <p:sp>
         <p:nvSpPr>
-          <p:cNvPr id="7" name="Text 5"/>
+          <p:cNvPr id="8" name="Text 6"/>
           <p:cNvSpPr/>
           <p:nvPr/>
         </p:nvSpPr>
@@ -2606,7 +2799,7 @@
       </p:sp>
       <p:sp>
         <p:nvSpPr>
-          <p:cNvPr id="8" name="Text 6"/>
+          <p:cNvPr id="9" name="Text 7"/>
           <p:cNvSpPr/>
           <p:nvPr/>
         </p:nvSpPr>
@@ -2662,7 +2855,7 @@
       </p:sp>
       <p:sp>
         <p:nvSpPr>
-          <p:cNvPr id="9" name="Text 7"/>
+          <p:cNvPr id="10" name="Text 8"/>
           <p:cNvSpPr/>
           <p:nvPr/>
         </p:nvSpPr>
@@ -2802,7 +2995,7 @@
                 <a:ea typeface="微软雅黑" pitchFamily="34" charset="-122"/>
                 <a:cs typeface="微软雅黑" pitchFamily="34" charset="-120"/>
               </a:rPr>
-              <a:t>11 / 15</a:t>
+              <a:t>11 / 17</a:t>
             </a:r>
             <a:endParaRPr lang="en-US" sz="1000" dirty="0"/>
           </a:p>
@@ -2841,7 +3034,7 @@
                 <a:ea typeface="微软雅黑" pitchFamily="34" charset="-122"/>
                 <a:cs typeface="微软雅黑" pitchFamily="34" charset="-120"/>
               </a:rPr>
-              <a:t>板书推演</a:t>
+              <a:t>动画演示 · 内存图推演</a:t>
             </a:r>
             <a:endParaRPr lang="en-US" sz="1400" dirty="0"/>
           </a:p>
@@ -2880,7 +3073,7 @@
                 <a:ea typeface="微软雅黑" pitchFamily="34" charset="-122"/>
                 <a:cs typeface="微软雅黑" pitchFamily="34" charset="-120"/>
               </a:rPr>
-              <a:t>从零推演：声明指针并顺着它改值</a:t>
+              <a:t>四步推演：声明指针并顺着它改值（本页逐条动画出现）</a:t>
             </a:r>
             <a:endParaRPr lang="en-US" sz="2800" dirty="0"/>
           </a:p>
@@ -2894,8 +3087,8 @@
         </p:nvSpPr>
         <p:spPr>
           <a:xfrm>
-            <a:off x="822960" y="2194560"/>
-            <a:ext cx="10545775" cy="685800"/>
+            <a:off x="896112" y="2395728"/>
+            <a:ext cx="10454335" cy="397764"/>
           </a:xfrm>
           <a:prstGeom prst="rect">
             <a:avLst/>
@@ -2908,58 +3101,50 @@
           <a:lstStyle/>
           <a:p>
             <a:pPr algn="l" indent="0" marL="0">
-              <a:buNone/>
-            </a:pPr>
-            <a:r>
-              <a:rPr lang="en-US" sz="1600" dirty="0">
-                <a:solidFill>
-                  <a:srgbClr val="1F2329"/>
+              <a:lnSpc>
+                <a:spcPct val="115000"/>
+              </a:lnSpc>
+              <a:buNone/>
+            </a:pPr>
+            <a:r>
+              <a:rPr lang="en-US" sz="1800" b="1" dirty="0">
+                <a:solidFill>
+                  <a:srgbClr val="1F4E9C"/>
                 </a:solidFill>
                 <a:latin typeface="微软雅黑" pitchFamily="34" charset="0"/>
                 <a:ea typeface="微软雅黑" pitchFamily="34" charset="-122"/>
                 <a:cs typeface="微软雅黑" pitchFamily="34" charset="-120"/>
               </a:rPr>
-              <a:t>任务：画内存格子推演四步。① 画格子x，值10（编号随手写如1000）；② 画指针p，把x的编号写进p，箭头指向x；③ 写 *p，读出10；④ 写 *p = 20，把格子里的10改成20。只画格子、编号、值、箭头，不写程序骨架</a:t>
-            </a:r>
-            <a:endParaRPr lang="en-US" sz="1600" dirty="0"/>
-          </a:p>
-        </p:txBody>
-      </p:sp>
-      <p:sp>
-        <p:nvSpPr>
-          <p:cNvPr id="6" name="Shape 4"/>
-          <p:cNvSpPr/>
-          <p:nvPr/>
-        </p:nvSpPr>
-        <p:spPr>
-          <a:xfrm>
-            <a:off x="822960" y="3017520"/>
-            <a:ext cx="10545775" cy="2788920"/>
-          </a:xfrm>
-          <a:prstGeom prst="rect">
-            <a:avLst/>
-          </a:prstGeom>
-          <a:solidFill>
-            <a:srgbClr val="FFFFFF"/>
-          </a:solidFill>
-          <a:ln w="12700">
-            <a:solidFill>
-              <a:srgbClr val="B9C0C9"/>
-            </a:solidFill>
-            <a:prstDash val="dash"/>
-          </a:ln>
-        </p:spPr>
-      </p:sp>
-      <p:sp>
-        <p:nvSpPr>
-          <p:cNvPr id="7" name="Text 5"/>
-          <p:cNvSpPr/>
-          <p:nvPr/>
-        </p:nvSpPr>
-        <p:spPr>
-          <a:xfrm>
-            <a:off x="822960" y="5349240"/>
-            <a:ext cx="10545775" cy="365760"/>
+              <a:t>•  </a:t>
+            </a:r>
+            <a:pPr algn="l" indent="0" marL="0">
+              <a:lnSpc>
+                <a:spcPct val="115000"/>
+              </a:lnSpc>
+              <a:buNone/>
+            </a:pPr>
+            <a:r>
+              <a:rPr lang="en-US" sz="1800" dirty="0">
+                <a:solidFill>
+                  <a:srgbClr val="000000"/>
+                </a:solidFill>
+              </a:rPr>
+              <a:t>① 画格子x：值10，门牌号随手写如1000（不写程序骨架，只画图）</a:t>
+            </a:r>
+            <a:endParaRPr lang="en-US" sz="1800" dirty="0"/>
+          </a:p>
+        </p:txBody>
+      </p:sp>
+      <p:sp>
+        <p:nvSpPr>
+          <p:cNvPr id="6" name="Text 4"/>
+          <p:cNvSpPr/>
+          <p:nvPr/>
+        </p:nvSpPr>
+        <p:spPr>
+          <a:xfrm>
+            <a:off x="896112" y="2866644"/>
+            <a:ext cx="10454335" cy="397764"/>
           </a:xfrm>
           <a:prstGeom prst="rect">
             <a:avLst/>
@@ -2968,24 +3153,153 @@
           <a:ln/>
         </p:spPr>
         <p:txBody>
-          <a:bodyPr wrap="square" rtlCol="0" anchor="ctr"/>
-          <a:lstStyle/>
-          <a:p>
-            <a:pPr algn="r" indent="0" marL="0">
-              <a:buNone/>
-            </a:pPr>
-            <a:r>
-              <a:rPr lang="en-US" sz="1200" dirty="0">
-                <a:solidFill>
-                  <a:srgbClr val="8A9099"/>
+          <a:bodyPr wrap="square" rtlCol="0" anchor="t"/>
+          <a:lstStyle/>
+          <a:p>
+            <a:pPr algn="l" indent="0" marL="0">
+              <a:lnSpc>
+                <a:spcPct val="115000"/>
+              </a:lnSpc>
+              <a:buNone/>
+            </a:pPr>
+            <a:r>
+              <a:rPr lang="en-US" sz="1800" b="1" dirty="0">
+                <a:solidFill>
+                  <a:srgbClr val="1F4E9C"/>
                 </a:solidFill>
                 <a:latin typeface="微软雅黑" pitchFamily="34" charset="0"/>
                 <a:ea typeface="微软雅黑" pitchFamily="34" charset="-122"/>
                 <a:cs typeface="微软雅黑" pitchFamily="34" charset="-120"/>
               </a:rPr>
-              <a:t>此处板书推演</a:t>
-            </a:r>
-            <a:endParaRPr lang="en-US" sz="1200" dirty="0"/>
+              <a:t>•  </a:t>
+            </a:r>
+            <a:pPr algn="l" indent="0" marL="0">
+              <a:lnSpc>
+                <a:spcPct val="115000"/>
+              </a:lnSpc>
+              <a:buNone/>
+            </a:pPr>
+            <a:r>
+              <a:rPr lang="en-US" sz="1800" dirty="0">
+                <a:solidFill>
+                  <a:srgbClr val="000000"/>
+                </a:solidFill>
+              </a:rPr>
+              <a:t>② 画格子p：里面放x的门牌号1000，箭头从p指向x，这就是p指向x</a:t>
+            </a:r>
+            <a:endParaRPr lang="en-US" sz="1800" dirty="0"/>
+          </a:p>
+        </p:txBody>
+      </p:sp>
+      <p:sp>
+        <p:nvSpPr>
+          <p:cNvPr id="7" name="Text 5"/>
+          <p:cNvSpPr/>
+          <p:nvPr/>
+        </p:nvSpPr>
+        <p:spPr>
+          <a:xfrm>
+            <a:off x="896112" y="3337560"/>
+            <a:ext cx="10454335" cy="397764"/>
+          </a:xfrm>
+          <a:prstGeom prst="rect">
+            <a:avLst/>
+          </a:prstGeom>
+          <a:noFill/>
+          <a:ln/>
+        </p:spPr>
+        <p:txBody>
+          <a:bodyPr wrap="square" rtlCol="0" anchor="t"/>
+          <a:lstStyle/>
+          <a:p>
+            <a:pPr algn="l" indent="0" marL="0">
+              <a:lnSpc>
+                <a:spcPct val="115000"/>
+              </a:lnSpc>
+              <a:buNone/>
+            </a:pPr>
+            <a:r>
+              <a:rPr lang="en-US" sz="1800" b="1" dirty="0">
+                <a:solidFill>
+                  <a:srgbClr val="1F4E9C"/>
+                </a:solidFill>
+                <a:latin typeface="微软雅黑" pitchFamily="34" charset="0"/>
+                <a:ea typeface="微软雅黑" pitchFamily="34" charset="-122"/>
+                <a:cs typeface="微软雅黑" pitchFamily="34" charset="-120"/>
+              </a:rPr>
+              <a:t>•  </a:t>
+            </a:r>
+            <a:pPr algn="l" indent="0" marL="0">
+              <a:lnSpc>
+                <a:spcPct val="115000"/>
+              </a:lnSpc>
+              <a:buNone/>
+            </a:pPr>
+            <a:r>
+              <a:rPr lang="en-US" sz="1800" dirty="0">
+                <a:solidFill>
+                  <a:srgbClr val="000000"/>
+                </a:solidFill>
+              </a:rPr>
+              <a:t>③ 写 *p：顺着箭头看过去，x那格里是10，所以*p是10</a:t>
+            </a:r>
+            <a:endParaRPr lang="en-US" sz="1800" dirty="0"/>
+          </a:p>
+        </p:txBody>
+      </p:sp>
+      <p:sp>
+        <p:nvSpPr>
+          <p:cNvPr id="8" name="Text 6"/>
+          <p:cNvSpPr/>
+          <p:nvPr/>
+        </p:nvSpPr>
+        <p:spPr>
+          <a:xfrm>
+            <a:off x="896112" y="3808476"/>
+            <a:ext cx="10454335" cy="740664"/>
+          </a:xfrm>
+          <a:prstGeom prst="rect">
+            <a:avLst/>
+          </a:prstGeom>
+          <a:noFill/>
+          <a:ln/>
+        </p:spPr>
+        <p:txBody>
+          <a:bodyPr wrap="square" rtlCol="0" anchor="t"/>
+          <a:lstStyle/>
+          <a:p>
+            <a:pPr algn="l" indent="0" marL="0">
+              <a:lnSpc>
+                <a:spcPct val="115000"/>
+              </a:lnSpc>
+              <a:buNone/>
+            </a:pPr>
+            <a:r>
+              <a:rPr lang="en-US" sz="1800" b="1" dirty="0">
+                <a:solidFill>
+                  <a:srgbClr val="1F4E9C"/>
+                </a:solidFill>
+                <a:latin typeface="微软雅黑" pitchFamily="34" charset="0"/>
+                <a:ea typeface="微软雅黑" pitchFamily="34" charset="-122"/>
+                <a:cs typeface="微软雅黑" pitchFamily="34" charset="-120"/>
+              </a:rPr>
+              <a:t>•  </a:t>
+            </a:r>
+            <a:pPr algn="l" indent="0" marL="0">
+              <a:lnSpc>
+                <a:spcPct val="115000"/>
+              </a:lnSpc>
+              <a:buNone/>
+            </a:pPr>
+            <a:r>
+              <a:rPr lang="en-US" sz="1800" dirty="0">
+                <a:solidFill>
+                  <a:srgbClr val="000000"/>
+                </a:solidFill>
+              </a:rPr>
+              <a:t>④ 写 *p = 20：顺着箭头把格子里的10改成20，x也是20，同一格内存（*p改的是x那格，p自己的格子没动）</a:t>
+            </a:r>
+            <a:endParaRPr lang="en-US" sz="1800" dirty="0"/>
           </a:p>
         </p:txBody>
       </p:sp>
@@ -3061,7 +3375,7 @@
                 <a:ea typeface="微软雅黑" pitchFamily="34" charset="-122"/>
                 <a:cs typeface="微软雅黑" pitchFamily="34" charset="-120"/>
               </a:rPr>
-              <a:t>12 / 15</a:t>
+              <a:t>12 / 17</a:t>
             </a:r>
             <a:endParaRPr lang="en-US" sz="1000" dirty="0"/>
           </a:p>
@@ -3385,7 +3699,7 @@
                 <a:ea typeface="微软雅黑" pitchFamily="34" charset="-122"/>
                 <a:cs typeface="微软雅黑" pitchFamily="34" charset="-120"/>
               </a:rPr>
-              <a:t>13 / 15</a:t>
+              <a:t>13 / 17</a:t>
             </a:r>
             <a:endParaRPr lang="en-US" sz="1000" dirty="0"/>
           </a:p>
@@ -3748,7 +4062,7 @@
                 <a:ea typeface="微软雅黑" pitchFamily="34" charset="-122"/>
                 <a:cs typeface="微软雅黑" pitchFamily="34" charset="-120"/>
               </a:rPr>
-              <a:t>14 / 15</a:t>
+              <a:t>14 / 17</a:t>
             </a:r>
             <a:endParaRPr lang="en-US" sz="1000" dirty="0"/>
           </a:p>
@@ -4111,7 +4425,7 @@
                 <a:ea typeface="微软雅黑" pitchFamily="34" charset="-122"/>
                 <a:cs typeface="微软雅黑" pitchFamily="34" charset="-120"/>
               </a:rPr>
-              <a:t>15 / 15</a:t>
+              <a:t>15 / 17</a:t>
             </a:r>
             <a:endParaRPr lang="en-US" sz="1000" dirty="0"/>
           </a:p>
@@ -4424,9 +4738,837 @@
                 <a:ea typeface="微软雅黑" pitchFamily="34" charset="-122"/>
                 <a:cs typeface="微软雅黑" pitchFamily="34" charset="-120"/>
               </a:rPr>
-              <a:t>参考答案在讲稿附录一</a:t>
+              <a:t>参考答案在本PPT最后两页，课后自行对照</a:t>
             </a:r>
             <a:endParaRPr lang="en-US" sz="1500" dirty="0"/>
+          </a:p>
+        </p:txBody>
+      </p:sp>
+    </p:spTree>
+  </p:cSld>
+  <p:clrMapOvr>
+    <a:masterClrMapping/>
+  </p:clrMapOvr>
+</p:sld>
+</file>
+
+<file path=ppt/slides/slide16.xml><?xml version="1.0" encoding="utf-8"?>
+<p:sld xmlns:a="http://schemas.openxmlformats.org/drawingml/2006/main" xmlns:r="http://schemas.openxmlformats.org/officeDocument/2006/relationships" xmlns:p="http://schemas.openxmlformats.org/presentationml/2006/main">
+  <p:cSld name="Slide 16">
+    <p:bg>
+      <p:bgPr>
+        <a:blipFill dpi="0" rotWithShape="1">
+          <a:blip r:embed="rId1">
+            <a:lum/>
+          </a:blip>
+          <a:srcRect/>
+          <a:stretch>
+            <a:fillRect/>
+          </a:stretch>
+        </a:blipFill>
+        <a:effectLst/>
+      </p:bgPr>
+    </p:bg>
+    <p:spTree>
+      <p:nvGrpSpPr>
+        <p:cNvPr id="1" name=""/>
+        <p:cNvGrpSpPr/>
+        <p:nvPr/>
+      </p:nvGrpSpPr>
+      <p:grpSpPr>
+        <a:xfrm>
+          <a:off x="0" y="0"/>
+          <a:ext cx="0" cy="0"/>
+          <a:chOff x="0" y="0"/>
+          <a:chExt cx="0" cy="0"/>
+        </a:xfrm>
+      </p:grpSpPr>
+      <p:sp>
+        <p:nvSpPr>
+          <p:cNvPr id="2" name="Text 0"/>
+          <p:cNvSpPr/>
+          <p:nvPr/>
+        </p:nvSpPr>
+        <p:spPr>
+          <a:xfrm>
+            <a:off x="10362895" y="6016752"/>
+            <a:ext cx="1463040" cy="320040"/>
+          </a:xfrm>
+          <a:prstGeom prst="rect">
+            <a:avLst/>
+          </a:prstGeom>
+          <a:noFill/>
+          <a:ln/>
+        </p:spPr>
+        <p:txBody>
+          <a:bodyPr wrap="square" rtlCol="0" anchor="ctr"/>
+          <a:lstStyle/>
+          <a:p>
+            <a:pPr algn="r" indent="0" marL="0">
+              <a:buNone/>
+            </a:pPr>
+            <a:r>
+              <a:rPr lang="en-US" sz="1000" dirty="0">
+                <a:solidFill>
+                  <a:srgbClr val="8A9099"/>
+                </a:solidFill>
+                <a:latin typeface="微软雅黑" pitchFamily="34" charset="0"/>
+                <a:ea typeface="微软雅黑" pitchFamily="34" charset="-122"/>
+                <a:cs typeface="微软雅黑" pitchFamily="34" charset="-120"/>
+              </a:rPr>
+              <a:t>16 / 17</a:t>
+            </a:r>
+            <a:endParaRPr lang="en-US" sz="1000" dirty="0"/>
+          </a:p>
+        </p:txBody>
+      </p:sp>
+      <p:sp>
+        <p:nvSpPr>
+          <p:cNvPr id="3" name="Text 1"/>
+          <p:cNvSpPr/>
+          <p:nvPr/>
+        </p:nvSpPr>
+        <p:spPr>
+          <a:xfrm>
+            <a:off x="822960" y="960120"/>
+            <a:ext cx="10545775" cy="365760"/>
+          </a:xfrm>
+          <a:prstGeom prst="rect">
+            <a:avLst/>
+          </a:prstGeom>
+          <a:noFill/>
+          <a:ln/>
+        </p:spPr>
+        <p:txBody>
+          <a:bodyPr wrap="square" rtlCol="0" anchor="ctr"/>
+          <a:lstStyle/>
+          <a:p>
+            <a:pPr algn="l" indent="0" marL="0">
+              <a:buNone/>
+            </a:pPr>
+            <a:r>
+              <a:rPr lang="en-US" sz="1400" b="1" dirty="0">
+                <a:solidFill>
+                  <a:srgbClr val="1F4E9C"/>
+                </a:solidFill>
+                <a:latin typeface="微软雅黑" pitchFamily="34" charset="0"/>
+                <a:ea typeface="微软雅黑" pitchFamily="34" charset="-122"/>
+                <a:cs typeface="微软雅黑" pitchFamily="34" charset="-120"/>
+              </a:rPr>
+              <a:t>参考答案 · 跟练题</a:t>
+            </a:r>
+            <a:endParaRPr lang="en-US" sz="1400" dirty="0"/>
+          </a:p>
+        </p:txBody>
+      </p:sp>
+      <p:sp>
+        <p:nvSpPr>
+          <p:cNvPr id="4" name="Text 2"/>
+          <p:cNvSpPr/>
+          <p:nvPr/>
+        </p:nvSpPr>
+        <p:spPr>
+          <a:xfrm>
+            <a:off x="822960" y="1344168"/>
+            <a:ext cx="10545775" cy="731520"/>
+          </a:xfrm>
+          <a:prstGeom prst="rect">
+            <a:avLst/>
+          </a:prstGeom>
+          <a:noFill/>
+          <a:ln/>
+        </p:spPr>
+        <p:txBody>
+          <a:bodyPr wrap="square" rtlCol="0" anchor="ctr"/>
+          <a:lstStyle/>
+          <a:p>
+            <a:pPr algn="l" indent="0" marL="0">
+              <a:buNone/>
+            </a:pPr>
+            <a:r>
+              <a:rPr lang="en-US" sz="2800" b="1" dirty="0">
+                <a:solidFill>
+                  <a:srgbClr val="1F2329"/>
+                </a:solidFill>
+                <a:latin typeface="微软雅黑" pitchFamily="34" charset="0"/>
+                <a:ea typeface="微软雅黑" pitchFamily="34" charset="-122"/>
+                <a:cs typeface="微软雅黑" pitchFamily="34" charset="-120"/>
+              </a:rPr>
+              <a:t>跟练题参考答案（自行对照）</a:t>
+            </a:r>
+            <a:endParaRPr lang="en-US" sz="2800" dirty="0"/>
+          </a:p>
+        </p:txBody>
+      </p:sp>
+      <p:sp>
+        <p:nvSpPr>
+          <p:cNvPr id="5" name="Shape 3"/>
+          <p:cNvSpPr/>
+          <p:nvPr/>
+        </p:nvSpPr>
+        <p:spPr>
+          <a:xfrm>
+            <a:off x="822960" y="2395728"/>
+            <a:ext cx="10545775" cy="2253654"/>
+          </a:xfrm>
+          <a:prstGeom prst="rect">
+            <a:avLst/>
+          </a:prstGeom>
+          <a:solidFill>
+            <a:srgbClr val="F7F9FC"/>
+          </a:solidFill>
+          <a:ln/>
+        </p:spPr>
+      </p:sp>
+      <p:sp>
+        <p:nvSpPr>
+          <p:cNvPr id="6" name="Shape 4"/>
+          <p:cNvSpPr/>
+          <p:nvPr/>
+        </p:nvSpPr>
+        <p:spPr>
+          <a:xfrm>
+            <a:off x="822960" y="2395728"/>
+            <a:ext cx="50292" cy="2253654"/>
+          </a:xfrm>
+          <a:prstGeom prst="rect">
+            <a:avLst/>
+          </a:prstGeom>
+          <a:solidFill>
+            <a:srgbClr val="1F4E9C"/>
+          </a:solidFill>
+          <a:ln/>
+        </p:spPr>
+      </p:sp>
+      <p:sp>
+        <p:nvSpPr>
+          <p:cNvPr id="7" name="Text 5"/>
+          <p:cNvSpPr/>
+          <p:nvPr/>
+        </p:nvSpPr>
+        <p:spPr>
+          <a:xfrm>
+            <a:off x="1078992" y="2505456"/>
+            <a:ext cx="10033711" cy="2034198"/>
+          </a:xfrm>
+          <a:prstGeom prst="rect">
+            <a:avLst/>
+          </a:prstGeom>
+          <a:noFill/>
+          <a:ln/>
+        </p:spPr>
+        <p:txBody>
+          <a:bodyPr wrap="square" rtlCol="0" anchor="t"/>
+          <a:lstStyle/>
+          <a:p>
+            <a:pPr algn="l" indent="0" marL="0">
+              <a:lnSpc>
+                <a:spcPct val="125000"/>
+              </a:lnSpc>
+              <a:buNone/>
+            </a:pPr>
+            <a:r>
+              <a:rPr lang="en-US" sz="1200" dirty="0">
+                <a:solidFill>
+                  <a:srgbClr val="1F2329"/>
+                </a:solidFill>
+                <a:latin typeface="Consolas" pitchFamily="34" charset="0"/>
+                <a:ea typeface="Consolas" pitchFamily="34" charset="-122"/>
+                <a:cs typeface="Consolas" pitchFamily="34" charset="-120"/>
+              </a:rPr>
+              <a:t>// 用*p把x改成25
+int main(){
+    int x = 10;
+    int *p = &amp;x;
+    *p = 25;
+    printf("%d\n", x);   // 25
+    return 0;
+}
+</a:t>
+            </a:r>
+            <a:endParaRPr lang="en-US" sz="1200" dirty="0"/>
+          </a:p>
+        </p:txBody>
+      </p:sp>
+      <p:sp>
+        <p:nvSpPr>
+          <p:cNvPr id="8" name="Text 6"/>
+          <p:cNvSpPr/>
+          <p:nvPr/>
+        </p:nvSpPr>
+        <p:spPr>
+          <a:xfrm>
+            <a:off x="896112" y="4850550"/>
+            <a:ext cx="10454335" cy="359664"/>
+          </a:xfrm>
+          <a:prstGeom prst="rect">
+            <a:avLst/>
+          </a:prstGeom>
+          <a:noFill/>
+          <a:ln/>
+        </p:spPr>
+        <p:txBody>
+          <a:bodyPr wrap="square" rtlCol="0" anchor="t"/>
+          <a:lstStyle/>
+          <a:p>
+            <a:pPr algn="l" indent="0" marL="0">
+              <a:lnSpc>
+                <a:spcPct val="115000"/>
+              </a:lnSpc>
+              <a:buNone/>
+            </a:pPr>
+            <a:r>
+              <a:rPr lang="en-US" sz="1600" b="1" dirty="0">
+                <a:solidFill>
+                  <a:srgbClr val="1F4E9C"/>
+                </a:solidFill>
+                <a:latin typeface="微软雅黑" pitchFamily="34" charset="0"/>
+                <a:ea typeface="微软雅黑" pitchFamily="34" charset="-122"/>
+                <a:cs typeface="微软雅黑" pitchFamily="34" charset="-120"/>
+              </a:rPr>
+              <a:t>•  </a:t>
+            </a:r>
+            <a:pPr algn="l" indent="0" marL="0">
+              <a:lnSpc>
+                <a:spcPct val="115000"/>
+              </a:lnSpc>
+              <a:buNone/>
+            </a:pPr>
+            <a:r>
+              <a:rPr lang="en-US" sz="1600" dirty="0">
+                <a:solidFill>
+                  <a:srgbClr val="000000"/>
+                </a:solidFill>
+              </a:rPr>
+              <a:t>内存图：格子x（10→25）、格子p存x的地址、箭头p→x</a:t>
+            </a:r>
+            <a:endParaRPr lang="en-US" sz="1600" dirty="0"/>
+          </a:p>
+        </p:txBody>
+      </p:sp>
+      <p:sp>
+        <p:nvSpPr>
+          <p:cNvPr id="9" name="Text 7"/>
+          <p:cNvSpPr/>
+          <p:nvPr/>
+        </p:nvSpPr>
+        <p:spPr>
+          <a:xfrm>
+            <a:off x="896112" y="5283366"/>
+            <a:ext cx="10454335" cy="359664"/>
+          </a:xfrm>
+          <a:prstGeom prst="rect">
+            <a:avLst/>
+          </a:prstGeom>
+          <a:noFill/>
+          <a:ln/>
+        </p:spPr>
+        <p:txBody>
+          <a:bodyPr wrap="square" rtlCol="0" anchor="t"/>
+          <a:lstStyle/>
+          <a:p>
+            <a:pPr algn="l" indent="0" marL="0">
+              <a:lnSpc>
+                <a:spcPct val="115000"/>
+              </a:lnSpc>
+              <a:buNone/>
+            </a:pPr>
+            <a:r>
+              <a:rPr lang="en-US" sz="1600" b="1" dirty="0">
+                <a:solidFill>
+                  <a:srgbClr val="1F4E9C"/>
+                </a:solidFill>
+                <a:latin typeface="微软雅黑" pitchFamily="34" charset="0"/>
+                <a:ea typeface="微软雅黑" pitchFamily="34" charset="-122"/>
+                <a:cs typeface="微软雅黑" pitchFamily="34" charset="-120"/>
+              </a:rPr>
+              <a:t>•  </a:t>
+            </a:r>
+            <a:pPr algn="l" indent="0" marL="0">
+              <a:lnSpc>
+                <a:spcPct val="115000"/>
+              </a:lnSpc>
+              <a:buNone/>
+            </a:pPr>
+            <a:r>
+              <a:rPr lang="en-US" sz="1600" dirty="0">
+                <a:solidFill>
+                  <a:srgbClr val="000000"/>
+                </a:solidFill>
+              </a:rPr>
+              <a:t>*p = 25改的是x那一格，p自己的格子纹丝不动</a:t>
+            </a:r>
+            <a:endParaRPr lang="en-US" sz="1600" dirty="0"/>
+          </a:p>
+        </p:txBody>
+      </p:sp>
+      <p:sp>
+        <p:nvSpPr>
+          <p:cNvPr id="10" name="Text 8"/>
+          <p:cNvSpPr/>
+          <p:nvPr/>
+        </p:nvSpPr>
+        <p:spPr>
+          <a:xfrm>
+            <a:off x="896112" y="5716182"/>
+            <a:ext cx="10454335" cy="359664"/>
+          </a:xfrm>
+          <a:prstGeom prst="rect">
+            <a:avLst/>
+          </a:prstGeom>
+          <a:noFill/>
+          <a:ln/>
+        </p:spPr>
+        <p:txBody>
+          <a:bodyPr wrap="square" rtlCol="0" anchor="t"/>
+          <a:lstStyle/>
+          <a:p>
+            <a:pPr algn="l" indent="0" marL="0">
+              <a:lnSpc>
+                <a:spcPct val="115000"/>
+              </a:lnSpc>
+              <a:buNone/>
+            </a:pPr>
+            <a:r>
+              <a:rPr lang="en-US" sz="1600" b="1" dirty="0">
+                <a:solidFill>
+                  <a:srgbClr val="1F4E9C"/>
+                </a:solidFill>
+                <a:latin typeface="微软雅黑" pitchFamily="34" charset="0"/>
+                <a:ea typeface="微软雅黑" pitchFamily="34" charset="-122"/>
+                <a:cs typeface="微软雅黑" pitchFamily="34" charset="-120"/>
+              </a:rPr>
+              <a:t>•  </a:t>
+            </a:r>
+            <a:pPr algn="l" indent="0" marL="0">
+              <a:lnSpc>
+                <a:spcPct val="115000"/>
+              </a:lnSpc>
+              <a:buNone/>
+            </a:pPr>
+            <a:r>
+              <a:rPr lang="en-US" sz="1600" dirty="0">
+                <a:solidFill>
+                  <a:srgbClr val="000000"/>
+                </a:solidFill>
+              </a:rPr>
+              <a:t>推演口诀：先找p里的门牌号，再顺门牌号找格子，最后在格子里改值</a:t>
+            </a:r>
+            <a:endParaRPr lang="en-US" sz="1600" dirty="0"/>
+          </a:p>
+        </p:txBody>
+      </p:sp>
+    </p:spTree>
+  </p:cSld>
+  <p:clrMapOvr>
+    <a:masterClrMapping/>
+  </p:clrMapOvr>
+</p:sld>
+</file>
+
+<file path=ppt/slides/slide17.xml><?xml version="1.0" encoding="utf-8"?>
+<p:sld xmlns:a="http://schemas.openxmlformats.org/drawingml/2006/main" xmlns:r="http://schemas.openxmlformats.org/officeDocument/2006/relationships" xmlns:p="http://schemas.openxmlformats.org/presentationml/2006/main">
+  <p:cSld name="Slide 17">
+    <p:bg>
+      <p:bgPr>
+        <a:blipFill dpi="0" rotWithShape="1">
+          <a:blip r:embed="rId1">
+            <a:lum/>
+          </a:blip>
+          <a:srcRect/>
+          <a:stretch>
+            <a:fillRect/>
+          </a:stretch>
+        </a:blipFill>
+        <a:effectLst/>
+      </p:bgPr>
+    </p:bg>
+    <p:spTree>
+      <p:nvGrpSpPr>
+        <p:cNvPr id="1" name=""/>
+        <p:cNvGrpSpPr/>
+        <p:nvPr/>
+      </p:nvGrpSpPr>
+      <p:grpSpPr>
+        <a:xfrm>
+          <a:off x="0" y="0"/>
+          <a:ext cx="0" cy="0"/>
+          <a:chOff x="0" y="0"/>
+          <a:chExt cx="0" cy="0"/>
+        </a:xfrm>
+      </p:grpSpPr>
+      <p:sp>
+        <p:nvSpPr>
+          <p:cNvPr id="2" name="Text 0"/>
+          <p:cNvSpPr/>
+          <p:nvPr/>
+        </p:nvSpPr>
+        <p:spPr>
+          <a:xfrm>
+            <a:off x="10362895" y="6016752"/>
+            <a:ext cx="1463040" cy="320040"/>
+          </a:xfrm>
+          <a:prstGeom prst="rect">
+            <a:avLst/>
+          </a:prstGeom>
+          <a:noFill/>
+          <a:ln/>
+        </p:spPr>
+        <p:txBody>
+          <a:bodyPr wrap="square" rtlCol="0" anchor="ctr"/>
+          <a:lstStyle/>
+          <a:p>
+            <a:pPr algn="r" indent="0" marL="0">
+              <a:buNone/>
+            </a:pPr>
+            <a:r>
+              <a:rPr lang="en-US" sz="1000" dirty="0">
+                <a:solidFill>
+                  <a:srgbClr val="8A9099"/>
+                </a:solidFill>
+                <a:latin typeface="微软雅黑" pitchFamily="34" charset="0"/>
+                <a:ea typeface="微软雅黑" pitchFamily="34" charset="-122"/>
+                <a:cs typeface="微软雅黑" pitchFamily="34" charset="-120"/>
+              </a:rPr>
+              <a:t>17 / 17</a:t>
+            </a:r>
+            <a:endParaRPr lang="en-US" sz="1000" dirty="0"/>
+          </a:p>
+        </p:txBody>
+      </p:sp>
+      <p:sp>
+        <p:nvSpPr>
+          <p:cNvPr id="3" name="Text 1"/>
+          <p:cNvSpPr/>
+          <p:nvPr/>
+        </p:nvSpPr>
+        <p:spPr>
+          <a:xfrm>
+            <a:off x="822960" y="960120"/>
+            <a:ext cx="10545775" cy="365760"/>
+          </a:xfrm>
+          <a:prstGeom prst="rect">
+            <a:avLst/>
+          </a:prstGeom>
+          <a:noFill/>
+          <a:ln/>
+        </p:spPr>
+        <p:txBody>
+          <a:bodyPr wrap="square" rtlCol="0" anchor="ctr"/>
+          <a:lstStyle/>
+          <a:p>
+            <a:pPr algn="l" indent="0" marL="0">
+              <a:buNone/>
+            </a:pPr>
+            <a:r>
+              <a:rPr lang="en-US" sz="1400" b="1" dirty="0">
+                <a:solidFill>
+                  <a:srgbClr val="1F4E9C"/>
+                </a:solidFill>
+                <a:latin typeface="微软雅黑" pitchFamily="34" charset="0"/>
+                <a:ea typeface="微软雅黑" pitchFamily="34" charset="-122"/>
+                <a:cs typeface="微软雅黑" pitchFamily="34" charset="-120"/>
+              </a:rPr>
+              <a:t>参考答案 · 模仿题</a:t>
+            </a:r>
+            <a:endParaRPr lang="en-US" sz="1400" dirty="0"/>
+          </a:p>
+        </p:txBody>
+      </p:sp>
+      <p:sp>
+        <p:nvSpPr>
+          <p:cNvPr id="4" name="Text 2"/>
+          <p:cNvSpPr/>
+          <p:nvPr/>
+        </p:nvSpPr>
+        <p:spPr>
+          <a:xfrm>
+            <a:off x="822960" y="1344168"/>
+            <a:ext cx="10545775" cy="731520"/>
+          </a:xfrm>
+          <a:prstGeom prst="rect">
+            <a:avLst/>
+          </a:prstGeom>
+          <a:noFill/>
+          <a:ln/>
+        </p:spPr>
+        <p:txBody>
+          <a:bodyPr wrap="square" rtlCol="0" anchor="ctr"/>
+          <a:lstStyle/>
+          <a:p>
+            <a:pPr algn="l" indent="0" marL="0">
+              <a:buNone/>
+            </a:pPr>
+            <a:r>
+              <a:rPr lang="en-US" sz="2800" b="1" dirty="0">
+                <a:solidFill>
+                  <a:srgbClr val="1F2329"/>
+                </a:solidFill>
+                <a:latin typeface="微软雅黑" pitchFamily="34" charset="0"/>
+                <a:ea typeface="微软雅黑" pitchFamily="34" charset="-122"/>
+                <a:cs typeface="微软雅黑" pitchFamily="34" charset="-120"/>
+              </a:rPr>
+              <a:t>模仿题参考答案（自行对照）</a:t>
+            </a:r>
+            <a:endParaRPr lang="en-US" sz="2800" dirty="0"/>
+          </a:p>
+        </p:txBody>
+      </p:sp>
+      <p:sp>
+        <p:nvSpPr>
+          <p:cNvPr id="5" name="Shape 3"/>
+          <p:cNvSpPr/>
+          <p:nvPr/>
+        </p:nvSpPr>
+        <p:spPr>
+          <a:xfrm>
+            <a:off x="822960" y="2395728"/>
+            <a:ext cx="10545775" cy="2253654"/>
+          </a:xfrm>
+          <a:prstGeom prst="rect">
+            <a:avLst/>
+          </a:prstGeom>
+          <a:solidFill>
+            <a:srgbClr val="F7F9FC"/>
+          </a:solidFill>
+          <a:ln/>
+        </p:spPr>
+      </p:sp>
+      <p:sp>
+        <p:nvSpPr>
+          <p:cNvPr id="6" name="Shape 4"/>
+          <p:cNvSpPr/>
+          <p:nvPr/>
+        </p:nvSpPr>
+        <p:spPr>
+          <a:xfrm>
+            <a:off x="822960" y="2395728"/>
+            <a:ext cx="50292" cy="2253654"/>
+          </a:xfrm>
+          <a:prstGeom prst="rect">
+            <a:avLst/>
+          </a:prstGeom>
+          <a:solidFill>
+            <a:srgbClr val="1F4E9C"/>
+          </a:solidFill>
+          <a:ln/>
+        </p:spPr>
+      </p:sp>
+      <p:sp>
+        <p:nvSpPr>
+          <p:cNvPr id="7" name="Text 5"/>
+          <p:cNvSpPr/>
+          <p:nvPr/>
+        </p:nvSpPr>
+        <p:spPr>
+          <a:xfrm>
+            <a:off x="1078992" y="2505456"/>
+            <a:ext cx="10033711" cy="2034198"/>
+          </a:xfrm>
+          <a:prstGeom prst="rect">
+            <a:avLst/>
+          </a:prstGeom>
+          <a:noFill/>
+          <a:ln/>
+        </p:spPr>
+        <p:txBody>
+          <a:bodyPr wrap="square" rtlCol="0" anchor="t"/>
+          <a:lstStyle/>
+          <a:p>
+            <a:pPr algn="l" indent="0" marL="0">
+              <a:lnSpc>
+                <a:spcPct val="125000"/>
+              </a:lnSpc>
+              <a:buNone/>
+            </a:pPr>
+            <a:r>
+              <a:rPr lang="en-US" sz="1200" dirty="0">
+                <a:solidFill>
+                  <a:srgbClr val="1F2329"/>
+                </a:solidFill>
+                <a:latin typeface="Consolas" pitchFamily="34" charset="0"/>
+                <a:ea typeface="Consolas" pitchFamily="34" charset="-122"/>
+                <a:cs typeface="Consolas" pitchFamily="34" charset="-120"/>
+              </a:rPr>
+              <a:t>// p改指向y
+int main(){
+    int x = 10, y = 20;
+    int *p = &amp;x;
+    p = &amp;y;
+    printf("%d\n", *p);  // 20
+    return 0;
+}
+</a:t>
+            </a:r>
+            <a:endParaRPr lang="en-US" sz="1200" dirty="0"/>
+          </a:p>
+        </p:txBody>
+      </p:sp>
+      <p:sp>
+        <p:nvSpPr>
+          <p:cNvPr id="8" name="Text 6"/>
+          <p:cNvSpPr/>
+          <p:nvPr/>
+        </p:nvSpPr>
+        <p:spPr>
+          <a:xfrm>
+            <a:off x="896112" y="4850550"/>
+            <a:ext cx="10454335" cy="359664"/>
+          </a:xfrm>
+          <a:prstGeom prst="rect">
+            <a:avLst/>
+          </a:prstGeom>
+          <a:noFill/>
+          <a:ln/>
+        </p:spPr>
+        <p:txBody>
+          <a:bodyPr wrap="square" rtlCol="0" anchor="t"/>
+          <a:lstStyle/>
+          <a:p>
+            <a:pPr algn="l" indent="0" marL="0">
+              <a:lnSpc>
+                <a:spcPct val="115000"/>
+              </a:lnSpc>
+              <a:buNone/>
+            </a:pPr>
+            <a:r>
+              <a:rPr lang="en-US" sz="1600" b="1" dirty="0">
+                <a:solidFill>
+                  <a:srgbClr val="1F4E9C"/>
+                </a:solidFill>
+                <a:latin typeface="微软雅黑" pitchFamily="34" charset="0"/>
+                <a:ea typeface="微软雅黑" pitchFamily="34" charset="-122"/>
+                <a:cs typeface="微软雅黑" pitchFamily="34" charset="-120"/>
+              </a:rPr>
+              <a:t>•  </a:t>
+            </a:r>
+            <a:pPr algn="l" indent="0" marL="0">
+              <a:lnSpc>
+                <a:spcPct val="115000"/>
+              </a:lnSpc>
+              <a:buNone/>
+            </a:pPr>
+            <a:r>
+              <a:rPr lang="en-US" sz="1600" dirty="0">
+                <a:solidFill>
+                  <a:srgbClr val="000000"/>
+                </a:solidFill>
+              </a:rPr>
+              <a:t>p = &amp;y只改p自己格子里的编号，x和y的值全程不动</a:t>
+            </a:r>
+            <a:endParaRPr lang="en-US" sz="1600" dirty="0"/>
+          </a:p>
+        </p:txBody>
+      </p:sp>
+      <p:sp>
+        <p:nvSpPr>
+          <p:cNvPr id="9" name="Text 7"/>
+          <p:cNvSpPr/>
+          <p:nvPr/>
+        </p:nvSpPr>
+        <p:spPr>
+          <a:xfrm>
+            <a:off x="896112" y="5283366"/>
+            <a:ext cx="10454335" cy="359664"/>
+          </a:xfrm>
+          <a:prstGeom prst="rect">
+            <a:avLst/>
+          </a:prstGeom>
+          <a:noFill/>
+          <a:ln/>
+        </p:spPr>
+        <p:txBody>
+          <a:bodyPr wrap="square" rtlCol="0" anchor="t"/>
+          <a:lstStyle/>
+          <a:p>
+            <a:pPr algn="l" indent="0" marL="0">
+              <a:lnSpc>
+                <a:spcPct val="115000"/>
+              </a:lnSpc>
+              <a:buNone/>
+            </a:pPr>
+            <a:r>
+              <a:rPr lang="en-US" sz="1600" b="1" dirty="0">
+                <a:solidFill>
+                  <a:srgbClr val="1F4E9C"/>
+                </a:solidFill>
+                <a:latin typeface="微软雅黑" pitchFamily="34" charset="0"/>
+                <a:ea typeface="微软雅黑" pitchFamily="34" charset="-122"/>
+                <a:cs typeface="微软雅黑" pitchFamily="34" charset="-120"/>
+              </a:rPr>
+              <a:t>•  </a:t>
+            </a:r>
+            <a:pPr algn="l" indent="0" marL="0">
+              <a:lnSpc>
+                <a:spcPct val="115000"/>
+              </a:lnSpc>
+              <a:buNone/>
+            </a:pPr>
+            <a:r>
+              <a:rPr lang="en-US" sz="1600" dirty="0">
+                <a:solidFill>
+                  <a:srgbClr val="000000"/>
+                </a:solidFill>
+              </a:rPr>
+              <a:t>常见错法：把p = &amp;y写成*p = &amp;y，这是把地址往x那格里塞，类型都对不上</a:t>
+            </a:r>
+            <a:endParaRPr lang="en-US" sz="1600" dirty="0"/>
+          </a:p>
+        </p:txBody>
+      </p:sp>
+      <p:sp>
+        <p:nvSpPr>
+          <p:cNvPr id="10" name="Text 8"/>
+          <p:cNvSpPr/>
+          <p:nvPr/>
+        </p:nvSpPr>
+        <p:spPr>
+          <a:xfrm>
+            <a:off x="896112" y="5716182"/>
+            <a:ext cx="10454335" cy="359664"/>
+          </a:xfrm>
+          <a:prstGeom prst="rect">
+            <a:avLst/>
+          </a:prstGeom>
+          <a:noFill/>
+          <a:ln/>
+        </p:spPr>
+        <p:txBody>
+          <a:bodyPr wrap="square" rtlCol="0" anchor="t"/>
+          <a:lstStyle/>
+          <a:p>
+            <a:pPr algn="l" indent="0" marL="0">
+              <a:lnSpc>
+                <a:spcPct val="115000"/>
+              </a:lnSpc>
+              <a:buNone/>
+            </a:pPr>
+            <a:r>
+              <a:rPr lang="en-US" sz="1600" b="1" dirty="0">
+                <a:solidFill>
+                  <a:srgbClr val="1F4E9C"/>
+                </a:solidFill>
+                <a:latin typeface="微软雅黑" pitchFamily="34" charset="0"/>
+                <a:ea typeface="微软雅黑" pitchFamily="34" charset="-122"/>
+                <a:cs typeface="微软雅黑" pitchFamily="34" charset="-120"/>
+              </a:rPr>
+              <a:t>•  </a:t>
+            </a:r>
+            <a:pPr algn="l" indent="0" marL="0">
+              <a:lnSpc>
+                <a:spcPct val="115000"/>
+              </a:lnSpc>
+              <a:buNone/>
+            </a:pPr>
+            <a:r>
+              <a:rPr lang="en-US" sz="1600" dirty="0">
+                <a:solidFill>
+                  <a:srgbClr val="000000"/>
+                </a:solidFill>
+              </a:rPr>
+              <a:t>代码省略#include &lt;stdio.h&gt;</a:t>
+            </a:r>
+            <a:endParaRPr lang="en-US" sz="1600" dirty="0"/>
           </a:p>
         </p:txBody>
       </p:sp>
@@ -4502,7 +5644,7 @@
                 <a:ea typeface="微软雅黑" pitchFamily="34" charset="-122"/>
                 <a:cs typeface="微软雅黑" pitchFamily="34" charset="-120"/>
               </a:rPr>
-              <a:t>2 / 15</a:t>
+              <a:t>2 / 17</a:t>
             </a:r>
             <a:endParaRPr lang="en-US" sz="1000" dirty="0"/>
           </a:p>
@@ -5294,7 +6436,7 @@
                 <a:ea typeface="微软雅黑" pitchFamily="34" charset="-122"/>
                 <a:cs typeface="微软雅黑" pitchFamily="34" charset="-120"/>
               </a:rPr>
-              <a:t>3 / 15</a:t>
+              <a:t>3 / 17</a:t>
             </a:r>
             <a:endParaRPr lang="en-US" sz="1000" dirty="0"/>
           </a:p>
@@ -6989,7 +8131,7 @@
                 <a:ea typeface="微软雅黑" pitchFamily="34" charset="-122"/>
                 <a:cs typeface="微软雅黑" pitchFamily="34" charset="-120"/>
               </a:rPr>
-              <a:t>4 / 15</a:t>
+              <a:t>4 / 17</a:t>
             </a:r>
             <a:endParaRPr lang="en-US" sz="1000" dirty="0"/>
           </a:p>
@@ -7832,7 +8974,7 @@
                 <a:ea typeface="微软雅黑" pitchFamily="34" charset="-122"/>
                 <a:cs typeface="微软雅黑" pitchFamily="34" charset="-120"/>
               </a:rPr>
-              <a:t>5 / 15</a:t>
+              <a:t>5 / 17</a:t>
             </a:r>
             <a:endParaRPr lang="en-US" sz="1000" dirty="0"/>
           </a:p>
@@ -8250,7 +9392,7 @@
                 <a:ea typeface="微软雅黑" pitchFamily="34" charset="-122"/>
                 <a:cs typeface="微软雅黑" pitchFamily="34" charset="-120"/>
               </a:rPr>
-              <a:t>6 / 15</a:t>
+              <a:t>6 / 17</a:t>
             </a:r>
             <a:endParaRPr lang="en-US" sz="1000" dirty="0"/>
           </a:p>
@@ -8349,19 +9491,34 @@
             <a:avLst/>
           </a:prstGeom>
           <a:solidFill>
-            <a:srgbClr val="F5F6F7"/>
+            <a:srgbClr val="F7F9FC"/>
           </a:solidFill>
-          <a:ln w="9525">
-            <a:solidFill>
-              <a:srgbClr val="D8DBE0"/>
-            </a:solidFill>
-            <a:prstDash val="solid"/>
-          </a:ln>
-        </p:spPr>
-      </p:sp>
-      <p:sp>
-        <p:nvSpPr>
-          <p:cNvPr id="6" name="Text 4"/>
+          <a:ln/>
+        </p:spPr>
+      </p:sp>
+      <p:sp>
+        <p:nvSpPr>
+          <p:cNvPr id="6" name="Shape 4"/>
+          <p:cNvSpPr/>
+          <p:nvPr/>
+        </p:nvSpPr>
+        <p:spPr>
+          <a:xfrm>
+            <a:off x="822960" y="2395728"/>
+            <a:ext cx="50292" cy="795528"/>
+          </a:xfrm>
+          <a:prstGeom prst="rect">
+            <a:avLst/>
+          </a:prstGeom>
+          <a:solidFill>
+            <a:srgbClr val="1F4E9C"/>
+          </a:solidFill>
+          <a:ln/>
+        </p:spPr>
+      </p:sp>
+      <p:sp>
+        <p:nvSpPr>
+          <p:cNvPr id="7" name="Text 5"/>
           <p:cNvSpPr/>
           <p:nvPr/>
         </p:nvSpPr>
@@ -8404,7 +9561,7 @@
       </p:sp>
       <p:sp>
         <p:nvSpPr>
-          <p:cNvPr id="7" name="Text 5"/>
+          <p:cNvPr id="8" name="Text 6"/>
           <p:cNvSpPr/>
           <p:nvPr/>
         </p:nvSpPr>
@@ -8460,7 +9617,7 @@
       </p:sp>
       <p:sp>
         <p:nvSpPr>
-          <p:cNvPr id="8" name="Text 6"/>
+          <p:cNvPr id="9" name="Text 7"/>
           <p:cNvSpPr/>
           <p:nvPr/>
         </p:nvSpPr>
@@ -8544,7 +9701,7 @@
       </p:sp>
       <p:sp>
         <p:nvSpPr>
-          <p:cNvPr id="9" name="Text 7"/>
+          <p:cNvPr id="10" name="Text 8"/>
           <p:cNvSpPr/>
           <p:nvPr/>
         </p:nvSpPr>
@@ -8670,7 +9827,7 @@
                 <a:ea typeface="微软雅黑" pitchFamily="34" charset="-122"/>
                 <a:cs typeface="微软雅黑" pitchFamily="34" charset="-120"/>
               </a:rPr>
-              <a:t>7 / 15</a:t>
+              <a:t>7 / 17</a:t>
             </a:r>
             <a:endParaRPr lang="en-US" sz="1000" dirty="0"/>
           </a:p>
@@ -8769,19 +9926,34 @@
             <a:avLst/>
           </a:prstGeom>
           <a:solidFill>
-            <a:srgbClr val="F5F6F7"/>
+            <a:srgbClr val="F7F9FC"/>
           </a:solidFill>
-          <a:ln w="9525">
-            <a:solidFill>
-              <a:srgbClr val="D8DBE0"/>
-            </a:solidFill>
-            <a:prstDash val="solid"/>
-          </a:ln>
-        </p:spPr>
-      </p:sp>
-      <p:sp>
-        <p:nvSpPr>
-          <p:cNvPr id="6" name="Text 4"/>
+          <a:ln/>
+        </p:spPr>
+      </p:sp>
+      <p:sp>
+        <p:nvSpPr>
+          <p:cNvPr id="6" name="Shape 4"/>
+          <p:cNvSpPr/>
+          <p:nvPr/>
+        </p:nvSpPr>
+        <p:spPr>
+          <a:xfrm>
+            <a:off x="822960" y="2395728"/>
+            <a:ext cx="50292" cy="1033272"/>
+          </a:xfrm>
+          <a:prstGeom prst="rect">
+            <a:avLst/>
+          </a:prstGeom>
+          <a:solidFill>
+            <a:srgbClr val="1F4E9C"/>
+          </a:solidFill>
+          <a:ln/>
+        </p:spPr>
+      </p:sp>
+      <p:sp>
+        <p:nvSpPr>
+          <p:cNvPr id="7" name="Text 5"/>
           <p:cNvSpPr/>
           <p:nvPr/>
         </p:nvSpPr>
@@ -8825,7 +9997,7 @@
       </p:sp>
       <p:sp>
         <p:nvSpPr>
-          <p:cNvPr id="7" name="Text 5"/>
+          <p:cNvPr id="8" name="Text 6"/>
           <p:cNvSpPr/>
           <p:nvPr/>
         </p:nvSpPr>
@@ -8895,7 +10067,7 @@
       </p:sp>
       <p:sp>
         <p:nvSpPr>
-          <p:cNvPr id="8" name="Text 6"/>
+          <p:cNvPr id="9" name="Text 7"/>
           <p:cNvSpPr/>
           <p:nvPr/>
         </p:nvSpPr>
@@ -8951,7 +10123,7 @@
       </p:sp>
       <p:sp>
         <p:nvSpPr>
-          <p:cNvPr id="9" name="Text 7"/>
+          <p:cNvPr id="10" name="Text 8"/>
           <p:cNvSpPr/>
           <p:nvPr/>
         </p:nvSpPr>
@@ -9077,7 +10249,7 @@
                 <a:ea typeface="微软雅黑" pitchFamily="34" charset="-122"/>
                 <a:cs typeface="微软雅黑" pitchFamily="34" charset="-120"/>
               </a:rPr>
-              <a:t>8 / 15</a:t>
+              <a:t>8 / 17</a:t>
             </a:r>
             <a:endParaRPr lang="en-US" sz="1000" dirty="0"/>
           </a:p>
@@ -9176,19 +10348,34 @@
             <a:avLst/>
           </a:prstGeom>
           <a:solidFill>
-            <a:srgbClr val="F5F6F7"/>
+            <a:srgbClr val="F7F9FC"/>
           </a:solidFill>
-          <a:ln w="9525">
-            <a:solidFill>
-              <a:srgbClr val="D8DBE0"/>
-            </a:solidFill>
-            <a:prstDash val="solid"/>
-          </a:ln>
-        </p:spPr>
-      </p:sp>
-      <p:sp>
-        <p:nvSpPr>
-          <p:cNvPr id="6" name="Text 4"/>
+          <a:ln/>
+        </p:spPr>
+      </p:sp>
+      <p:sp>
+        <p:nvSpPr>
+          <p:cNvPr id="6" name="Shape 4"/>
+          <p:cNvSpPr/>
+          <p:nvPr/>
+        </p:nvSpPr>
+        <p:spPr>
+          <a:xfrm>
+            <a:off x="822960" y="2395728"/>
+            <a:ext cx="50292" cy="1033272"/>
+          </a:xfrm>
+          <a:prstGeom prst="rect">
+            <a:avLst/>
+          </a:prstGeom>
+          <a:solidFill>
+            <a:srgbClr val="1F4E9C"/>
+          </a:solidFill>
+          <a:ln/>
+        </p:spPr>
+      </p:sp>
+      <p:sp>
+        <p:nvSpPr>
+          <p:cNvPr id="7" name="Text 5"/>
           <p:cNvSpPr/>
           <p:nvPr/>
         </p:nvSpPr>
@@ -9232,7 +10419,7 @@
       </p:sp>
       <p:sp>
         <p:nvSpPr>
-          <p:cNvPr id="7" name="Text 5"/>
+          <p:cNvPr id="8" name="Text 6"/>
           <p:cNvSpPr/>
           <p:nvPr/>
         </p:nvSpPr>
@@ -9288,7 +10475,7 @@
       </p:sp>
       <p:sp>
         <p:nvSpPr>
-          <p:cNvPr id="8" name="Text 6"/>
+          <p:cNvPr id="9" name="Text 7"/>
           <p:cNvSpPr/>
           <p:nvPr/>
         </p:nvSpPr>
@@ -9344,7 +10531,7 @@
       </p:sp>
       <p:sp>
         <p:nvSpPr>
-          <p:cNvPr id="9" name="Text 7"/>
+          <p:cNvPr id="10" name="Text 8"/>
           <p:cNvSpPr/>
           <p:nvPr/>
         </p:nvSpPr>
@@ -9498,7 +10685,7 @@
                 <a:ea typeface="微软雅黑" pitchFamily="34" charset="-122"/>
                 <a:cs typeface="微软雅黑" pitchFamily="34" charset="-120"/>
               </a:rPr>
-              <a:t>9 / 15</a:t>
+              <a:t>9 / 17</a:t>
             </a:r>
             <a:endParaRPr lang="en-US" sz="1000" dirty="0"/>
           </a:p>
@@ -9597,19 +10784,34 @@
             <a:avLst/>
           </a:prstGeom>
           <a:solidFill>
-            <a:srgbClr val="F5F6F7"/>
+            <a:srgbClr val="F7F9FC"/>
           </a:solidFill>
-          <a:ln w="9525">
-            <a:solidFill>
-              <a:srgbClr val="D8DBE0"/>
-            </a:solidFill>
-            <a:prstDash val="solid"/>
-          </a:ln>
-        </p:spPr>
-      </p:sp>
-      <p:sp>
-        <p:nvSpPr>
-          <p:cNvPr id="6" name="Text 4"/>
+          <a:ln/>
+        </p:spPr>
+      </p:sp>
+      <p:sp>
+        <p:nvSpPr>
+          <p:cNvPr id="6" name="Shape 4"/>
+          <p:cNvSpPr/>
+          <p:nvPr/>
+        </p:nvSpPr>
+        <p:spPr>
+          <a:xfrm>
+            <a:off x="822960" y="2395728"/>
+            <a:ext cx="50292" cy="1033272"/>
+          </a:xfrm>
+          <a:prstGeom prst="rect">
+            <a:avLst/>
+          </a:prstGeom>
+          <a:solidFill>
+            <a:srgbClr val="1F4E9C"/>
+          </a:solidFill>
+          <a:ln/>
+        </p:spPr>
+      </p:sp>
+      <p:sp>
+        <p:nvSpPr>
+          <p:cNvPr id="7" name="Text 5"/>
           <p:cNvSpPr/>
           <p:nvPr/>
         </p:nvSpPr>
@@ -9653,7 +10855,7 @@
       </p:sp>
       <p:sp>
         <p:nvSpPr>
-          <p:cNvPr id="7" name="Text 5"/>
+          <p:cNvPr id="8" name="Text 6"/>
           <p:cNvSpPr/>
           <p:nvPr/>
         </p:nvSpPr>
@@ -9737,7 +10939,7 @@
       </p:sp>
       <p:sp>
         <p:nvSpPr>
-          <p:cNvPr id="8" name="Text 6"/>
+          <p:cNvPr id="9" name="Text 7"/>
           <p:cNvSpPr/>
           <p:nvPr/>
         </p:nvSpPr>
@@ -9793,7 +10995,7 @@
       </p:sp>
       <p:sp>
         <p:nvSpPr>
-          <p:cNvPr id="9" name="Text 7"/>
+          <p:cNvPr id="10" name="Text 8"/>
           <p:cNvSpPr/>
           <p:nvPr/>
         </p:nvSpPr>

--- a/课件/C1/C1-B-01/C1-B-01.pptx
+++ b/课件/C1/C1-B-01/C1-B-01.pptx
@@ -3034,7 +3034,7 @@
                 <a:ea typeface="微软雅黑" pitchFamily="34" charset="-122"/>
                 <a:cs typeface="微软雅黑" pitchFamily="34" charset="-120"/>
               </a:rPr>
-              <a:t>动画演示 · 内存图推演</a:t>
+              <a:t>内存图推演</a:t>
             </a:r>
             <a:endParaRPr lang="en-US" sz="1400" dirty="0"/>
           </a:p>
@@ -3073,7 +3073,7 @@
                 <a:ea typeface="微软雅黑" pitchFamily="34" charset="-122"/>
                 <a:cs typeface="微软雅黑" pitchFamily="34" charset="-120"/>
               </a:rPr>
-              <a:t>四步推演：声明指针并顺着它改值（本页逐条动画出现）</a:t>
+              <a:t>四步推演：声明指针并顺着它改值（拿纸跟着画）</a:t>
             </a:r>
             <a:endParaRPr lang="en-US" sz="2800" dirty="0"/>
           </a:p>
@@ -3129,7 +3129,7 @@
                   <a:srgbClr val="000000"/>
                 </a:solidFill>
               </a:rPr>
-              <a:t>① 画格子x：值10，门牌号随手写如1000（不写程序骨架，只画图）</a:t>
+              <a:t>① 画格子x：值10，门牌号随手写如1000</a:t>
             </a:r>
             <a:endParaRPr lang="en-US" sz="1800" dirty="0"/>
           </a:p>
